--- a/16_RC4/Figures/Figures.pptx
+++ b/16_RC4/Figures/Figures.pptx
@@ -5,7 +5,7 @@
     <p:sldMasterId id="2147483648" r:id="rId1"/>
   </p:sldMasterIdLst>
   <p:notesMasterIdLst>
-    <p:notesMasterId r:id="rId20"/>
+    <p:notesMasterId r:id="rId21"/>
   </p:notesMasterIdLst>
   <p:sldIdLst>
     <p:sldId id="256" r:id="rId2"/>
@@ -15,17 +15,18 @@
     <p:sldId id="258" r:id="rId6"/>
     <p:sldId id="259" r:id="rId7"/>
     <p:sldId id="260" r:id="rId8"/>
-    <p:sldId id="262" r:id="rId9"/>
-    <p:sldId id="272" r:id="rId10"/>
-    <p:sldId id="261" r:id="rId11"/>
-    <p:sldId id="271" r:id="rId12"/>
-    <p:sldId id="269" r:id="rId13"/>
-    <p:sldId id="270" r:id="rId14"/>
-    <p:sldId id="263" r:id="rId15"/>
-    <p:sldId id="265" r:id="rId16"/>
-    <p:sldId id="266" r:id="rId17"/>
-    <p:sldId id="267" r:id="rId18"/>
-    <p:sldId id="268" r:id="rId19"/>
+    <p:sldId id="274" r:id="rId9"/>
+    <p:sldId id="262" r:id="rId10"/>
+    <p:sldId id="272" r:id="rId11"/>
+    <p:sldId id="261" r:id="rId12"/>
+    <p:sldId id="271" r:id="rId13"/>
+    <p:sldId id="269" r:id="rId14"/>
+    <p:sldId id="270" r:id="rId15"/>
+    <p:sldId id="263" r:id="rId16"/>
+    <p:sldId id="265" r:id="rId17"/>
+    <p:sldId id="266" r:id="rId18"/>
+    <p:sldId id="267" r:id="rId19"/>
+    <p:sldId id="268" r:id="rId20"/>
   </p:sldIdLst>
   <p:sldSz cx="12192000" cy="6858000"/>
   <p:notesSz cx="6858000" cy="9144000"/>
@@ -214,7 +215,7 @@
           <a:p>
             <a:fld id="{088B47D2-DC99-4023-8FAB-B1A01B8BED66}" type="datetimeFigureOut">
               <a:rPr lang="fr-FR" smtClean="0"/>
-              <a:t>18/02/2025</a:t>
+              <a:t>06/04/2026</a:t>
             </a:fld>
             <a:endParaRPr lang="fr-FR"/>
           </a:p>
@@ -630,7 +631,7 @@
           <a:p>
             <a:fld id="{15EE27B1-7D19-4D3E-BA9F-563B97DD4C0D}" type="slidenum">
               <a:rPr lang="fr-FR" smtClean="0"/>
-              <a:t>10</a:t>
+              <a:t>11</a:t>
             </a:fld>
             <a:endParaRPr lang="fr-FR"/>
           </a:p>
@@ -738,7 +739,7 @@
           <a:p>
             <a:fld id="{15EE27B1-7D19-4D3E-BA9F-563B97DD4C0D}" type="slidenum">
               <a:rPr lang="fr-FR" smtClean="0"/>
-              <a:t>12</a:t>
+              <a:t>13</a:t>
             </a:fld>
             <a:endParaRPr lang="fr-FR"/>
           </a:p>
@@ -904,7 +905,7 @@
           <a:p>
             <a:fld id="{E1825551-6D9B-4F56-8A53-B2612FCF8466}" type="datetimeFigureOut">
               <a:rPr lang="fr-FR" smtClean="0"/>
-              <a:t>18/02/2025</a:t>
+              <a:t>06/04/2026</a:t>
             </a:fld>
             <a:endParaRPr lang="fr-FR"/>
           </a:p>
@@ -1102,7 +1103,7 @@
           <a:p>
             <a:fld id="{E1825551-6D9B-4F56-8A53-B2612FCF8466}" type="datetimeFigureOut">
               <a:rPr lang="fr-FR" smtClean="0"/>
-              <a:t>18/02/2025</a:t>
+              <a:t>06/04/2026</a:t>
             </a:fld>
             <a:endParaRPr lang="fr-FR"/>
           </a:p>
@@ -1310,7 +1311,7 @@
           <a:p>
             <a:fld id="{E1825551-6D9B-4F56-8A53-B2612FCF8466}" type="datetimeFigureOut">
               <a:rPr lang="fr-FR" smtClean="0"/>
-              <a:t>18/02/2025</a:t>
+              <a:t>06/04/2026</a:t>
             </a:fld>
             <a:endParaRPr lang="fr-FR"/>
           </a:p>
@@ -1508,7 +1509,7 @@
           <a:p>
             <a:fld id="{E1825551-6D9B-4F56-8A53-B2612FCF8466}" type="datetimeFigureOut">
               <a:rPr lang="fr-FR" smtClean="0"/>
-              <a:t>18/02/2025</a:t>
+              <a:t>06/04/2026</a:t>
             </a:fld>
             <a:endParaRPr lang="fr-FR"/>
           </a:p>
@@ -1783,7 +1784,7 @@
           <a:p>
             <a:fld id="{E1825551-6D9B-4F56-8A53-B2612FCF8466}" type="datetimeFigureOut">
               <a:rPr lang="fr-FR" smtClean="0"/>
-              <a:t>18/02/2025</a:t>
+              <a:t>06/04/2026</a:t>
             </a:fld>
             <a:endParaRPr lang="fr-FR"/>
           </a:p>
@@ -2048,7 +2049,7 @@
           <a:p>
             <a:fld id="{E1825551-6D9B-4F56-8A53-B2612FCF8466}" type="datetimeFigureOut">
               <a:rPr lang="fr-FR" smtClean="0"/>
-              <a:t>18/02/2025</a:t>
+              <a:t>06/04/2026</a:t>
             </a:fld>
             <a:endParaRPr lang="fr-FR"/>
           </a:p>
@@ -2460,7 +2461,7 @@
           <a:p>
             <a:fld id="{E1825551-6D9B-4F56-8A53-B2612FCF8466}" type="datetimeFigureOut">
               <a:rPr lang="fr-FR" smtClean="0"/>
-              <a:t>18/02/2025</a:t>
+              <a:t>06/04/2026</a:t>
             </a:fld>
             <a:endParaRPr lang="fr-FR"/>
           </a:p>
@@ -2601,7 +2602,7 @@
           <a:p>
             <a:fld id="{E1825551-6D9B-4F56-8A53-B2612FCF8466}" type="datetimeFigureOut">
               <a:rPr lang="fr-FR" smtClean="0"/>
-              <a:t>18/02/2025</a:t>
+              <a:t>06/04/2026</a:t>
             </a:fld>
             <a:endParaRPr lang="fr-FR"/>
           </a:p>
@@ -2714,7 +2715,7 @@
           <a:p>
             <a:fld id="{E1825551-6D9B-4F56-8A53-B2612FCF8466}" type="datetimeFigureOut">
               <a:rPr lang="fr-FR" smtClean="0"/>
-              <a:t>18/02/2025</a:t>
+              <a:t>06/04/2026</a:t>
             </a:fld>
             <a:endParaRPr lang="fr-FR"/>
           </a:p>
@@ -3025,7 +3026,7 @@
           <a:p>
             <a:fld id="{E1825551-6D9B-4F56-8A53-B2612FCF8466}" type="datetimeFigureOut">
               <a:rPr lang="fr-FR" smtClean="0"/>
-              <a:t>18/02/2025</a:t>
+              <a:t>06/04/2026</a:t>
             </a:fld>
             <a:endParaRPr lang="fr-FR"/>
           </a:p>
@@ -3313,7 +3314,7 @@
           <a:p>
             <a:fld id="{E1825551-6D9B-4F56-8A53-B2612FCF8466}" type="datetimeFigureOut">
               <a:rPr lang="fr-FR" smtClean="0"/>
-              <a:t>18/02/2025</a:t>
+              <a:t>06/04/2026</a:t>
             </a:fld>
             <a:endParaRPr lang="fr-FR"/>
           </a:p>
@@ -3554,7 +3555,7 @@
           <a:p>
             <a:fld id="{E1825551-6D9B-4F56-8A53-B2612FCF8466}" type="datetimeFigureOut">
               <a:rPr lang="fr-FR" smtClean="0"/>
-              <a:t>18/02/2025</a:t>
+              <a:t>06/04/2026</a:t>
             </a:fld>
             <a:endParaRPr lang="fr-FR"/>
           </a:p>
@@ -4389,6 +4390,95 @@
   <p:cSld>
     <p:spTree>
       <p:nvGrpSpPr>
+        <p:cNvPr id="1" name="">
+          <a:extLst>
+            <a:ext uri="{FF2B5EF4-FFF2-40B4-BE49-F238E27FC236}">
+              <a16:creationId xmlns:a16="http://schemas.microsoft.com/office/drawing/2014/main" id="{2D1B5B4F-C0E0-A648-356B-CB4550E6A2A8}"/>
+            </a:ext>
+          </a:extLst>
+        </p:cNvPr>
+        <p:cNvGrpSpPr/>
+        <p:nvPr/>
+      </p:nvGrpSpPr>
+      <p:grpSpPr>
+        <a:xfrm>
+          <a:off x="0" y="0"/>
+          <a:ext cx="0" cy="0"/>
+          <a:chOff x="0" y="0"/>
+          <a:chExt cx="0" cy="0"/>
+        </a:xfrm>
+      </p:grpSpPr>
+      <p:sp>
+        <p:nvSpPr>
+          <p:cNvPr id="4" name="Titre 3">
+            <a:extLst>
+              <a:ext uri="{FF2B5EF4-FFF2-40B4-BE49-F238E27FC236}">
+                <a16:creationId xmlns:a16="http://schemas.microsoft.com/office/drawing/2014/main" id="{09E8A4D1-0111-9B71-040B-A441D54D405F}"/>
+              </a:ext>
+            </a:extLst>
+          </p:cNvPr>
+          <p:cNvSpPr>
+            <a:spLocks noGrp="1"/>
+          </p:cNvSpPr>
+          <p:nvPr>
+            <p:ph type="title"/>
+          </p:nvPr>
+        </p:nvSpPr>
+        <p:spPr/>
+        <p:txBody>
+          <a:bodyPr/>
+          <a:lstStyle/>
+          <a:p>
+            <a:r>
+              <a:rPr lang="fr-FR" dirty="0"/>
+              <a:t>Modèle inverse</a:t>
+            </a:r>
+          </a:p>
+        </p:txBody>
+      </p:sp>
+      <p:sp>
+        <p:nvSpPr>
+          <p:cNvPr id="5" name="Espace réservé du texte 4">
+            <a:extLst>
+              <a:ext uri="{FF2B5EF4-FFF2-40B4-BE49-F238E27FC236}">
+                <a16:creationId xmlns:a16="http://schemas.microsoft.com/office/drawing/2014/main" id="{B5CAE9EC-5093-714D-BE89-7C5EE8BE66A3}"/>
+              </a:ext>
+            </a:extLst>
+          </p:cNvPr>
+          <p:cNvSpPr>
+            <a:spLocks noGrp="1"/>
+          </p:cNvSpPr>
+          <p:nvPr>
+            <p:ph type="body" idx="1"/>
+          </p:nvPr>
+        </p:nvSpPr>
+        <p:spPr/>
+        <p:txBody>
+          <a:bodyPr/>
+          <a:lstStyle/>
+          <a:p>
+            <a:endParaRPr lang="fr-FR"/>
+          </a:p>
+        </p:txBody>
+      </p:sp>
+    </p:spTree>
+    <p:extLst>
+      <p:ext uri="{BB962C8B-B14F-4D97-AF65-F5344CB8AC3E}">
+        <p14:creationId xmlns:p14="http://schemas.microsoft.com/office/powerpoint/2010/main" val="1426399900"/>
+      </p:ext>
+    </p:extLst>
+  </p:cSld>
+  <p:clrMapOvr>
+    <a:masterClrMapping/>
+  </p:clrMapOvr>
+</p:sld>
+</file>
+
+<file path=ppt/slides/slide11.xml><?xml version="1.0" encoding="utf-8"?>
+<p:sld xmlns:a="http://schemas.openxmlformats.org/drawingml/2006/main" xmlns:r="http://schemas.openxmlformats.org/officeDocument/2006/relationships" xmlns:p="http://schemas.openxmlformats.org/presentationml/2006/main">
+  <p:cSld>
+    <p:spTree>
+      <p:nvGrpSpPr>
         <p:cNvPr id="1" name=""/>
         <p:cNvGrpSpPr/>
         <p:nvPr/>
@@ -8884,7 +8974,7 @@
 </p:sld>
 </file>
 
-<file path=ppt/slides/slide11.xml><?xml version="1.0" encoding="utf-8"?>
+<file path=ppt/slides/slide12.xml><?xml version="1.0" encoding="utf-8"?>
 <p:sld xmlns:a="http://schemas.openxmlformats.org/drawingml/2006/main" xmlns:r="http://schemas.openxmlformats.org/officeDocument/2006/relationships" xmlns:p="http://schemas.openxmlformats.org/presentationml/2006/main">
   <p:cSld>
     <p:spTree>
@@ -8967,7 +9057,7 @@
 </p:sld>
 </file>
 
-<file path=ppt/slides/slide12.xml><?xml version="1.0" encoding="utf-8"?>
+<file path=ppt/slides/slide13.xml><?xml version="1.0" encoding="utf-8"?>
 <p:sld xmlns:a="http://schemas.openxmlformats.org/drawingml/2006/main" xmlns:r="http://schemas.openxmlformats.org/officeDocument/2006/relationships" xmlns:p="http://schemas.openxmlformats.org/presentationml/2006/main">
   <p:cSld>
     <p:spTree>
@@ -16988,7 +17078,7 @@
 </p:sld>
 </file>
 
-<file path=ppt/slides/slide13.xml><?xml version="1.0" encoding="utf-8"?>
+<file path=ppt/slides/slide14.xml><?xml version="1.0" encoding="utf-8"?>
 <p:sld xmlns:a="http://schemas.openxmlformats.org/drawingml/2006/main" xmlns:r="http://schemas.openxmlformats.org/officeDocument/2006/relationships" xmlns:p="http://schemas.openxmlformats.org/presentationml/2006/main">
   <p:cSld>
     <p:spTree>
@@ -24966,7 +25056,7 @@
 </p:sld>
 </file>
 
-<file path=ppt/slides/slide14.xml><?xml version="1.0" encoding="utf-8"?>
+<file path=ppt/slides/slide15.xml><?xml version="1.0" encoding="utf-8"?>
 <p:sld xmlns:a="http://schemas.openxmlformats.org/drawingml/2006/main" xmlns:r="http://schemas.openxmlformats.org/officeDocument/2006/relationships" xmlns:p="http://schemas.openxmlformats.org/presentationml/2006/main">
   <p:cSld>
     <p:spTree>
@@ -32179,7 +32269,7 @@
 </p:sld>
 </file>
 
-<file path=ppt/slides/slide15.xml><?xml version="1.0" encoding="utf-8"?>
+<file path=ppt/slides/slide16.xml><?xml version="1.0" encoding="utf-8"?>
 <p:sld xmlns:a="http://schemas.openxmlformats.org/drawingml/2006/main" xmlns:r="http://schemas.openxmlformats.org/officeDocument/2006/relationships" xmlns:p="http://schemas.openxmlformats.org/presentationml/2006/main">
   <p:cSld>
     <p:spTree>
@@ -32233,7 +32323,7 @@
 </p:sld>
 </file>
 
-<file path=ppt/slides/slide16.xml><?xml version="1.0" encoding="utf-8"?>
+<file path=ppt/slides/slide17.xml><?xml version="1.0" encoding="utf-8"?>
 <p:sld xmlns:a="http://schemas.openxmlformats.org/drawingml/2006/main" xmlns:r="http://schemas.openxmlformats.org/officeDocument/2006/relationships" xmlns:p="http://schemas.openxmlformats.org/presentationml/2006/main">
   <p:cSld>
     <p:spTree>
@@ -32373,7 +32463,7 @@
 </p:sld>
 </file>
 
-<file path=ppt/slides/slide17.xml><?xml version="1.0" encoding="utf-8"?>
+<file path=ppt/slides/slide18.xml><?xml version="1.0" encoding="utf-8"?>
 <p:sld xmlns:a="http://schemas.openxmlformats.org/drawingml/2006/main" xmlns:r="http://schemas.openxmlformats.org/officeDocument/2006/relationships" xmlns:p="http://schemas.openxmlformats.org/presentationml/2006/main">
   <p:cSld>
     <p:spTree>
@@ -32427,7 +32517,7 @@
 </p:sld>
 </file>
 
-<file path=ppt/slides/slide18.xml><?xml version="1.0" encoding="utf-8"?>
+<file path=ppt/slides/slide19.xml><?xml version="1.0" encoding="utf-8"?>
 <p:sld xmlns:a="http://schemas.openxmlformats.org/drawingml/2006/main" xmlns:r="http://schemas.openxmlformats.org/officeDocument/2006/relationships" xmlns:p="http://schemas.openxmlformats.org/presentationml/2006/main">
   <p:cSld>
     <p:spTree>
@@ -40016,6 +40106,4183 @@
   <p:cSld>
     <p:spTree>
       <p:nvGrpSpPr>
+        <p:cNvPr id="1" name="">
+          <a:extLst>
+            <a:ext uri="{FF2B5EF4-FFF2-40B4-BE49-F238E27FC236}">
+              <a16:creationId xmlns:a16="http://schemas.microsoft.com/office/drawing/2014/main" id="{B9685839-669F-4D80-3D99-5F9EC07E17DC}"/>
+            </a:ext>
+          </a:extLst>
+        </p:cNvPr>
+        <p:cNvGrpSpPr/>
+        <p:nvPr/>
+      </p:nvGrpSpPr>
+      <p:grpSpPr>
+        <a:xfrm>
+          <a:off x="0" y="0"/>
+          <a:ext cx="0" cy="0"/>
+          <a:chOff x="0" y="0"/>
+          <a:chExt cx="0" cy="0"/>
+        </a:xfrm>
+      </p:grpSpPr>
+      <p:cxnSp>
+        <p:nvCxnSpPr>
+          <p:cNvPr id="48" name="Connecteur droit 47">
+            <a:extLst>
+              <a:ext uri="{FF2B5EF4-FFF2-40B4-BE49-F238E27FC236}">
+                <a16:creationId xmlns:a16="http://schemas.microsoft.com/office/drawing/2014/main" id="{23BA5347-19CA-99C1-7905-5F373B55B5FD}"/>
+              </a:ext>
+            </a:extLst>
+          </p:cNvPr>
+          <p:cNvCxnSpPr>
+            <a:cxnSpLocks/>
+            <a:stCxn id="26" idx="7"/>
+            <a:endCxn id="18" idx="1"/>
+          </p:cNvCxnSpPr>
+          <p:nvPr/>
+        </p:nvCxnSpPr>
+        <p:spPr>
+          <a:xfrm flipV="1">
+            <a:off x="6607337" y="492450"/>
+            <a:ext cx="2780558" cy="3185159"/>
+          </a:xfrm>
+          <a:prstGeom prst="line">
+            <a:avLst/>
+          </a:prstGeom>
+          <a:ln w="19050">
+            <a:solidFill>
+              <a:srgbClr val="7030A0"/>
+            </a:solidFill>
+          </a:ln>
+        </p:spPr>
+        <p:style>
+          <a:lnRef idx="1">
+            <a:schemeClr val="accent1"/>
+          </a:lnRef>
+          <a:fillRef idx="0">
+            <a:schemeClr val="accent1"/>
+          </a:fillRef>
+          <a:effectRef idx="0">
+            <a:schemeClr val="accent1"/>
+          </a:effectRef>
+          <a:fontRef idx="minor">
+            <a:schemeClr val="tx1"/>
+          </a:fontRef>
+        </p:style>
+      </p:cxnSp>
+      <p:grpSp>
+        <p:nvGrpSpPr>
+          <p:cNvPr id="92" name="Groupe 91">
+            <a:extLst>
+              <a:ext uri="{FF2B5EF4-FFF2-40B4-BE49-F238E27FC236}">
+                <a16:creationId xmlns:a16="http://schemas.microsoft.com/office/drawing/2014/main" id="{AC151979-9E35-B708-4ACA-FA1A45176B1B}"/>
+              </a:ext>
+            </a:extLst>
+          </p:cNvPr>
+          <p:cNvGrpSpPr/>
+          <p:nvPr/>
+        </p:nvGrpSpPr>
+        <p:grpSpPr>
+          <a:xfrm>
+            <a:off x="2360064" y="413369"/>
+            <a:ext cx="7488750" cy="5318744"/>
+            <a:chOff x="2360064" y="413369"/>
+            <a:chExt cx="7488750" cy="5318744"/>
+          </a:xfrm>
+        </p:grpSpPr>
+        <p:sp>
+          <p:nvSpPr>
+            <p:cNvPr id="4" name="Rectangle : coins arrondis 3">
+              <a:extLst>
+                <a:ext uri="{FF2B5EF4-FFF2-40B4-BE49-F238E27FC236}">
+                  <a16:creationId xmlns:a16="http://schemas.microsoft.com/office/drawing/2014/main" id="{66BB8E52-6A3E-80E8-B232-3D0713B6078B}"/>
+                </a:ext>
+              </a:extLst>
+            </p:cNvPr>
+            <p:cNvSpPr/>
+            <p:nvPr/>
+          </p:nvSpPr>
+          <p:spPr>
+            <a:xfrm>
+              <a:off x="2504439" y="552741"/>
+              <a:ext cx="7200000" cy="5040000"/>
+            </a:xfrm>
+            <a:prstGeom prst="roundRect">
+              <a:avLst>
+                <a:gd name="adj" fmla="val 2563"/>
+              </a:avLst>
+            </a:prstGeom>
+            <a:noFill/>
+            <a:ln w="19050">
+              <a:solidFill>
+                <a:srgbClr val="002060"/>
+              </a:solidFill>
+            </a:ln>
+          </p:spPr>
+          <p:style>
+            <a:lnRef idx="2">
+              <a:schemeClr val="accent1">
+                <a:shade val="50000"/>
+              </a:schemeClr>
+            </a:lnRef>
+            <a:fillRef idx="1">
+              <a:schemeClr val="accent1"/>
+            </a:fillRef>
+            <a:effectRef idx="0">
+              <a:schemeClr val="accent1"/>
+            </a:effectRef>
+            <a:fontRef idx="minor">
+              <a:schemeClr val="lt1"/>
+            </a:fontRef>
+          </p:style>
+          <p:txBody>
+            <a:bodyPr rtlCol="0" anchor="ctr"/>
+            <a:lstStyle/>
+            <a:p>
+              <a:pPr algn="ctr"/>
+              <a:endParaRPr lang="fr-FR"/>
+            </a:p>
+          </p:txBody>
+        </p:sp>
+        <p:sp>
+          <p:nvSpPr>
+            <p:cNvPr id="18" name="Ellipse 17">
+              <a:extLst>
+                <a:ext uri="{FF2B5EF4-FFF2-40B4-BE49-F238E27FC236}">
+                  <a16:creationId xmlns:a16="http://schemas.microsoft.com/office/drawing/2014/main" id="{5A84E9B6-86C6-6E9E-B612-DA50C48EEF27}"/>
+                </a:ext>
+              </a:extLst>
+            </p:cNvPr>
+            <p:cNvSpPr/>
+            <p:nvPr/>
+          </p:nvSpPr>
+          <p:spPr>
+            <a:xfrm>
+              <a:off x="9308814" y="413369"/>
+              <a:ext cx="540000" cy="540000"/>
+            </a:xfrm>
+            <a:prstGeom prst="ellipse">
+              <a:avLst/>
+            </a:prstGeom>
+            <a:solidFill>
+              <a:schemeClr val="bg1"/>
+            </a:solidFill>
+            <a:ln w="19050">
+              <a:solidFill>
+                <a:srgbClr val="00B050"/>
+              </a:solidFill>
+            </a:ln>
+          </p:spPr>
+          <p:style>
+            <a:lnRef idx="2">
+              <a:schemeClr val="accent1">
+                <a:shade val="50000"/>
+              </a:schemeClr>
+            </a:lnRef>
+            <a:fillRef idx="1">
+              <a:schemeClr val="accent1"/>
+            </a:fillRef>
+            <a:effectRef idx="0">
+              <a:schemeClr val="accent1"/>
+            </a:effectRef>
+            <a:fontRef idx="minor">
+              <a:schemeClr val="lt1"/>
+            </a:fontRef>
+          </p:style>
+          <p:txBody>
+            <a:bodyPr rtlCol="0" anchor="ctr"/>
+            <a:lstStyle/>
+            <a:p>
+              <a:pPr algn="ctr"/>
+              <a:endParaRPr lang="fr-FR" dirty="0"/>
+            </a:p>
+          </p:txBody>
+        </p:sp>
+        <p:sp>
+          <p:nvSpPr>
+            <p:cNvPr id="29" name="Ellipse 28">
+              <a:extLst>
+                <a:ext uri="{FF2B5EF4-FFF2-40B4-BE49-F238E27FC236}">
+                  <a16:creationId xmlns:a16="http://schemas.microsoft.com/office/drawing/2014/main" id="{55AB5099-9E18-8757-55AE-2DC7E7808D6D}"/>
+                </a:ext>
+              </a:extLst>
+            </p:cNvPr>
+            <p:cNvSpPr/>
+            <p:nvPr/>
+          </p:nvSpPr>
+          <p:spPr>
+            <a:xfrm>
+              <a:off x="9488814" y="593369"/>
+              <a:ext cx="180000" cy="180000"/>
+            </a:xfrm>
+            <a:prstGeom prst="ellipse">
+              <a:avLst/>
+            </a:prstGeom>
+            <a:noFill/>
+            <a:ln w="19050">
+              <a:solidFill>
+                <a:srgbClr val="002060"/>
+              </a:solidFill>
+            </a:ln>
+          </p:spPr>
+          <p:style>
+            <a:lnRef idx="2">
+              <a:schemeClr val="accent1">
+                <a:shade val="50000"/>
+              </a:schemeClr>
+            </a:lnRef>
+            <a:fillRef idx="1">
+              <a:schemeClr val="accent1"/>
+            </a:fillRef>
+            <a:effectRef idx="0">
+              <a:schemeClr val="accent1"/>
+            </a:effectRef>
+            <a:fontRef idx="minor">
+              <a:schemeClr val="lt1"/>
+            </a:fontRef>
+          </p:style>
+          <p:txBody>
+            <a:bodyPr rtlCol="0" anchor="ctr"/>
+            <a:lstStyle/>
+            <a:p>
+              <a:pPr algn="ctr"/>
+              <a:endParaRPr lang="fr-FR" dirty="0"/>
+            </a:p>
+          </p:txBody>
+        </p:sp>
+        <p:sp>
+          <p:nvSpPr>
+            <p:cNvPr id="33" name="Ellipse 32">
+              <a:extLst>
+                <a:ext uri="{FF2B5EF4-FFF2-40B4-BE49-F238E27FC236}">
+                  <a16:creationId xmlns:a16="http://schemas.microsoft.com/office/drawing/2014/main" id="{B1DF18DA-C883-30F9-BDEA-3367B884BC71}"/>
+                </a:ext>
+              </a:extLst>
+            </p:cNvPr>
+            <p:cNvSpPr/>
+            <p:nvPr/>
+          </p:nvSpPr>
+          <p:spPr>
+            <a:xfrm>
+              <a:off x="2360064" y="413369"/>
+              <a:ext cx="540000" cy="540000"/>
+            </a:xfrm>
+            <a:prstGeom prst="ellipse">
+              <a:avLst/>
+            </a:prstGeom>
+            <a:solidFill>
+              <a:schemeClr val="bg1"/>
+            </a:solidFill>
+            <a:ln w="19050">
+              <a:solidFill>
+                <a:srgbClr val="00B050"/>
+              </a:solidFill>
+            </a:ln>
+          </p:spPr>
+          <p:style>
+            <a:lnRef idx="2">
+              <a:schemeClr val="accent1">
+                <a:shade val="50000"/>
+              </a:schemeClr>
+            </a:lnRef>
+            <a:fillRef idx="1">
+              <a:schemeClr val="accent1"/>
+            </a:fillRef>
+            <a:effectRef idx="0">
+              <a:schemeClr val="accent1"/>
+            </a:effectRef>
+            <a:fontRef idx="minor">
+              <a:schemeClr val="lt1"/>
+            </a:fontRef>
+          </p:style>
+          <p:txBody>
+            <a:bodyPr rtlCol="0" anchor="ctr"/>
+            <a:lstStyle/>
+            <a:p>
+              <a:pPr algn="ctr"/>
+              <a:endParaRPr lang="fr-FR" dirty="0"/>
+            </a:p>
+          </p:txBody>
+        </p:sp>
+        <p:sp>
+          <p:nvSpPr>
+            <p:cNvPr id="34" name="Ellipse 33">
+              <a:extLst>
+                <a:ext uri="{FF2B5EF4-FFF2-40B4-BE49-F238E27FC236}">
+                  <a16:creationId xmlns:a16="http://schemas.microsoft.com/office/drawing/2014/main" id="{F3FF0B63-4CDD-CB4E-0323-D33BC2162F8E}"/>
+                </a:ext>
+              </a:extLst>
+            </p:cNvPr>
+            <p:cNvSpPr/>
+            <p:nvPr/>
+          </p:nvSpPr>
+          <p:spPr>
+            <a:xfrm>
+              <a:off x="2540064" y="593369"/>
+              <a:ext cx="180000" cy="180000"/>
+            </a:xfrm>
+            <a:prstGeom prst="ellipse">
+              <a:avLst/>
+            </a:prstGeom>
+            <a:noFill/>
+            <a:ln w="19050">
+              <a:solidFill>
+                <a:srgbClr val="002060"/>
+              </a:solidFill>
+            </a:ln>
+          </p:spPr>
+          <p:style>
+            <a:lnRef idx="2">
+              <a:schemeClr val="accent1">
+                <a:shade val="50000"/>
+              </a:schemeClr>
+            </a:lnRef>
+            <a:fillRef idx="1">
+              <a:schemeClr val="accent1"/>
+            </a:fillRef>
+            <a:effectRef idx="0">
+              <a:schemeClr val="accent1"/>
+            </a:effectRef>
+            <a:fontRef idx="minor">
+              <a:schemeClr val="lt1"/>
+            </a:fontRef>
+          </p:style>
+          <p:txBody>
+            <a:bodyPr rtlCol="0" anchor="ctr"/>
+            <a:lstStyle/>
+            <a:p>
+              <a:pPr algn="ctr"/>
+              <a:endParaRPr lang="fr-FR" dirty="0"/>
+            </a:p>
+          </p:txBody>
+        </p:sp>
+        <p:sp>
+          <p:nvSpPr>
+            <p:cNvPr id="36" name="Ellipse 35">
+              <a:extLst>
+                <a:ext uri="{FF2B5EF4-FFF2-40B4-BE49-F238E27FC236}">
+                  <a16:creationId xmlns:a16="http://schemas.microsoft.com/office/drawing/2014/main" id="{67B114D7-1D55-3575-0EC0-97C2548DBB77}"/>
+                </a:ext>
+              </a:extLst>
+            </p:cNvPr>
+            <p:cNvSpPr/>
+            <p:nvPr/>
+          </p:nvSpPr>
+          <p:spPr>
+            <a:xfrm>
+              <a:off x="2360064" y="5192113"/>
+              <a:ext cx="540000" cy="540000"/>
+            </a:xfrm>
+            <a:prstGeom prst="ellipse">
+              <a:avLst/>
+            </a:prstGeom>
+            <a:solidFill>
+              <a:schemeClr val="bg1"/>
+            </a:solidFill>
+            <a:ln w="19050">
+              <a:solidFill>
+                <a:srgbClr val="00B050"/>
+              </a:solidFill>
+            </a:ln>
+          </p:spPr>
+          <p:style>
+            <a:lnRef idx="2">
+              <a:schemeClr val="accent1">
+                <a:shade val="50000"/>
+              </a:schemeClr>
+            </a:lnRef>
+            <a:fillRef idx="1">
+              <a:schemeClr val="accent1"/>
+            </a:fillRef>
+            <a:effectRef idx="0">
+              <a:schemeClr val="accent1"/>
+            </a:effectRef>
+            <a:fontRef idx="minor">
+              <a:schemeClr val="lt1"/>
+            </a:fontRef>
+          </p:style>
+          <p:txBody>
+            <a:bodyPr rtlCol="0" anchor="ctr"/>
+            <a:lstStyle/>
+            <a:p>
+              <a:pPr algn="ctr"/>
+              <a:endParaRPr lang="fr-FR" dirty="0"/>
+            </a:p>
+          </p:txBody>
+        </p:sp>
+        <p:sp>
+          <p:nvSpPr>
+            <p:cNvPr id="37" name="Ellipse 36">
+              <a:extLst>
+                <a:ext uri="{FF2B5EF4-FFF2-40B4-BE49-F238E27FC236}">
+                  <a16:creationId xmlns:a16="http://schemas.microsoft.com/office/drawing/2014/main" id="{2815D545-6CBD-C18E-474E-10B2E1A5BDFF}"/>
+                </a:ext>
+              </a:extLst>
+            </p:cNvPr>
+            <p:cNvSpPr/>
+            <p:nvPr/>
+          </p:nvSpPr>
+          <p:spPr>
+            <a:xfrm>
+              <a:off x="2540064" y="5372113"/>
+              <a:ext cx="180000" cy="180000"/>
+            </a:xfrm>
+            <a:prstGeom prst="ellipse">
+              <a:avLst/>
+            </a:prstGeom>
+            <a:noFill/>
+            <a:ln w="19050">
+              <a:solidFill>
+                <a:srgbClr val="002060"/>
+              </a:solidFill>
+            </a:ln>
+          </p:spPr>
+          <p:style>
+            <a:lnRef idx="2">
+              <a:schemeClr val="accent1">
+                <a:shade val="50000"/>
+              </a:schemeClr>
+            </a:lnRef>
+            <a:fillRef idx="1">
+              <a:schemeClr val="accent1"/>
+            </a:fillRef>
+            <a:effectRef idx="0">
+              <a:schemeClr val="accent1"/>
+            </a:effectRef>
+            <a:fontRef idx="minor">
+              <a:schemeClr val="lt1"/>
+            </a:fontRef>
+          </p:style>
+          <p:txBody>
+            <a:bodyPr rtlCol="0" anchor="ctr"/>
+            <a:lstStyle/>
+            <a:p>
+              <a:pPr algn="ctr"/>
+              <a:endParaRPr lang="fr-FR" dirty="0"/>
+            </a:p>
+          </p:txBody>
+        </p:sp>
+        <p:sp>
+          <p:nvSpPr>
+            <p:cNvPr id="38" name="Ellipse 37">
+              <a:extLst>
+                <a:ext uri="{FF2B5EF4-FFF2-40B4-BE49-F238E27FC236}">
+                  <a16:creationId xmlns:a16="http://schemas.microsoft.com/office/drawing/2014/main" id="{BE915BB5-4123-4C8A-8D1C-1E14C3DFB5C3}"/>
+                </a:ext>
+              </a:extLst>
+            </p:cNvPr>
+            <p:cNvSpPr/>
+            <p:nvPr/>
+          </p:nvSpPr>
+          <p:spPr>
+            <a:xfrm>
+              <a:off x="9308814" y="5192113"/>
+              <a:ext cx="540000" cy="540000"/>
+            </a:xfrm>
+            <a:prstGeom prst="ellipse">
+              <a:avLst/>
+            </a:prstGeom>
+            <a:solidFill>
+              <a:schemeClr val="bg1"/>
+            </a:solidFill>
+            <a:ln w="19050">
+              <a:solidFill>
+                <a:srgbClr val="00B050"/>
+              </a:solidFill>
+            </a:ln>
+          </p:spPr>
+          <p:style>
+            <a:lnRef idx="2">
+              <a:schemeClr val="accent1">
+                <a:shade val="50000"/>
+              </a:schemeClr>
+            </a:lnRef>
+            <a:fillRef idx="1">
+              <a:schemeClr val="accent1"/>
+            </a:fillRef>
+            <a:effectRef idx="0">
+              <a:schemeClr val="accent1"/>
+            </a:effectRef>
+            <a:fontRef idx="minor">
+              <a:schemeClr val="lt1"/>
+            </a:fontRef>
+          </p:style>
+          <p:txBody>
+            <a:bodyPr rtlCol="0" anchor="ctr"/>
+            <a:lstStyle/>
+            <a:p>
+              <a:pPr algn="ctr"/>
+              <a:endParaRPr lang="fr-FR" dirty="0"/>
+            </a:p>
+          </p:txBody>
+        </p:sp>
+        <p:sp>
+          <p:nvSpPr>
+            <p:cNvPr id="39" name="Ellipse 38">
+              <a:extLst>
+                <a:ext uri="{FF2B5EF4-FFF2-40B4-BE49-F238E27FC236}">
+                  <a16:creationId xmlns:a16="http://schemas.microsoft.com/office/drawing/2014/main" id="{6606C6D7-7CEF-83B6-B776-201C83243499}"/>
+                </a:ext>
+              </a:extLst>
+            </p:cNvPr>
+            <p:cNvSpPr/>
+            <p:nvPr/>
+          </p:nvSpPr>
+          <p:spPr>
+            <a:xfrm>
+              <a:off x="9488814" y="5372113"/>
+              <a:ext cx="180000" cy="180000"/>
+            </a:xfrm>
+            <a:prstGeom prst="ellipse">
+              <a:avLst/>
+            </a:prstGeom>
+            <a:noFill/>
+            <a:ln w="19050">
+              <a:solidFill>
+                <a:srgbClr val="002060"/>
+              </a:solidFill>
+            </a:ln>
+          </p:spPr>
+          <p:style>
+            <a:lnRef idx="2">
+              <a:schemeClr val="accent1">
+                <a:shade val="50000"/>
+              </a:schemeClr>
+            </a:lnRef>
+            <a:fillRef idx="1">
+              <a:schemeClr val="accent1"/>
+            </a:fillRef>
+            <a:effectRef idx="0">
+              <a:schemeClr val="accent1"/>
+            </a:effectRef>
+            <a:fontRef idx="minor">
+              <a:schemeClr val="lt1"/>
+            </a:fontRef>
+          </p:style>
+          <p:txBody>
+            <a:bodyPr rtlCol="0" anchor="ctr"/>
+            <a:lstStyle/>
+            <a:p>
+              <a:pPr algn="ctr"/>
+              <a:endParaRPr lang="fr-FR" dirty="0"/>
+            </a:p>
+          </p:txBody>
+        </p:sp>
+        <p:sp>
+          <p:nvSpPr>
+            <p:cNvPr id="16" name="Rectangle : coins arrondis 15">
+              <a:extLst>
+                <a:ext uri="{FF2B5EF4-FFF2-40B4-BE49-F238E27FC236}">
+                  <a16:creationId xmlns:a16="http://schemas.microsoft.com/office/drawing/2014/main" id="{64473AC3-8456-550F-52C9-CAE8B3D05ACA}"/>
+                </a:ext>
+              </a:extLst>
+            </p:cNvPr>
+            <p:cNvSpPr/>
+            <p:nvPr/>
+          </p:nvSpPr>
+          <p:spPr>
+            <a:xfrm>
+              <a:off x="2504439" y="552741"/>
+              <a:ext cx="7200000" cy="5040000"/>
+            </a:xfrm>
+            <a:prstGeom prst="roundRect">
+              <a:avLst>
+                <a:gd name="adj" fmla="val 2563"/>
+              </a:avLst>
+            </a:prstGeom>
+            <a:noFill/>
+            <a:ln w="9525">
+              <a:solidFill>
+                <a:srgbClr val="002060"/>
+              </a:solidFill>
+              <a:prstDash val="dash"/>
+            </a:ln>
+          </p:spPr>
+          <p:style>
+            <a:lnRef idx="2">
+              <a:schemeClr val="accent1">
+                <a:shade val="50000"/>
+              </a:schemeClr>
+            </a:lnRef>
+            <a:fillRef idx="1">
+              <a:schemeClr val="accent1"/>
+            </a:fillRef>
+            <a:effectRef idx="0">
+              <a:schemeClr val="accent1"/>
+            </a:effectRef>
+            <a:fontRef idx="minor">
+              <a:schemeClr val="lt1"/>
+            </a:fontRef>
+          </p:style>
+          <p:txBody>
+            <a:bodyPr rtlCol="0" anchor="ctr"/>
+            <a:lstStyle/>
+            <a:p>
+              <a:pPr algn="ctr"/>
+              <a:endParaRPr lang="fr-FR" dirty="0"/>
+            </a:p>
+          </p:txBody>
+        </p:sp>
+      </p:grpSp>
+      <p:cxnSp>
+        <p:nvCxnSpPr>
+          <p:cNvPr id="59" name="Connecteur droit 58">
+            <a:extLst>
+              <a:ext uri="{FF2B5EF4-FFF2-40B4-BE49-F238E27FC236}">
+                <a16:creationId xmlns:a16="http://schemas.microsoft.com/office/drawing/2014/main" id="{D4296863-4E9B-FC80-558F-D416C858547A}"/>
+              </a:ext>
+            </a:extLst>
+          </p:cNvPr>
+          <p:cNvCxnSpPr>
+            <a:cxnSpLocks/>
+            <a:stCxn id="29" idx="7"/>
+            <a:endCxn id="18" idx="7"/>
+          </p:cNvCxnSpPr>
+          <p:nvPr/>
+        </p:nvCxnSpPr>
+        <p:spPr>
+          <a:xfrm flipV="1">
+            <a:off x="9642454" y="492450"/>
+            <a:ext cx="127279" cy="127279"/>
+          </a:xfrm>
+          <a:prstGeom prst="line">
+            <a:avLst/>
+          </a:prstGeom>
+          <a:solidFill>
+            <a:schemeClr val="bg1"/>
+          </a:solidFill>
+          <a:ln w="19050">
+            <a:solidFill>
+              <a:srgbClr val="00B050"/>
+            </a:solidFill>
+          </a:ln>
+        </p:spPr>
+        <p:style>
+          <a:lnRef idx="2">
+            <a:schemeClr val="accent1">
+              <a:shade val="50000"/>
+            </a:schemeClr>
+          </a:lnRef>
+          <a:fillRef idx="1">
+            <a:schemeClr val="accent1"/>
+          </a:fillRef>
+          <a:effectRef idx="0">
+            <a:schemeClr val="accent1"/>
+          </a:effectRef>
+          <a:fontRef idx="minor">
+            <a:schemeClr val="lt1"/>
+          </a:fontRef>
+        </p:style>
+      </p:cxnSp>
+      <p:cxnSp>
+        <p:nvCxnSpPr>
+          <p:cNvPr id="63" name="Connecteur droit 62">
+            <a:extLst>
+              <a:ext uri="{FF2B5EF4-FFF2-40B4-BE49-F238E27FC236}">
+                <a16:creationId xmlns:a16="http://schemas.microsoft.com/office/drawing/2014/main" id="{3D627AC6-EFE1-C6E1-8CE1-B86E80D45CD0}"/>
+              </a:ext>
+            </a:extLst>
+          </p:cNvPr>
+          <p:cNvCxnSpPr>
+            <a:cxnSpLocks/>
+            <a:stCxn id="39" idx="5"/>
+            <a:endCxn id="38" idx="5"/>
+          </p:cNvCxnSpPr>
+          <p:nvPr/>
+        </p:nvCxnSpPr>
+        <p:spPr>
+          <a:xfrm>
+            <a:off x="9642454" y="5525753"/>
+            <a:ext cx="127279" cy="127279"/>
+          </a:xfrm>
+          <a:prstGeom prst="line">
+            <a:avLst/>
+          </a:prstGeom>
+          <a:solidFill>
+            <a:schemeClr val="bg1"/>
+          </a:solidFill>
+          <a:ln w="19050">
+            <a:solidFill>
+              <a:srgbClr val="00B050"/>
+            </a:solidFill>
+          </a:ln>
+        </p:spPr>
+        <p:style>
+          <a:lnRef idx="2">
+            <a:schemeClr val="accent1">
+              <a:shade val="50000"/>
+            </a:schemeClr>
+          </a:lnRef>
+          <a:fillRef idx="1">
+            <a:schemeClr val="accent1"/>
+          </a:fillRef>
+          <a:effectRef idx="0">
+            <a:schemeClr val="accent1"/>
+          </a:effectRef>
+          <a:fontRef idx="minor">
+            <a:schemeClr val="lt1"/>
+          </a:fontRef>
+        </p:style>
+      </p:cxnSp>
+      <p:cxnSp>
+        <p:nvCxnSpPr>
+          <p:cNvPr id="64" name="Connecteur droit 63">
+            <a:extLst>
+              <a:ext uri="{FF2B5EF4-FFF2-40B4-BE49-F238E27FC236}">
+                <a16:creationId xmlns:a16="http://schemas.microsoft.com/office/drawing/2014/main" id="{5493EDF1-00EC-F1E0-9E53-AA07249D3F06}"/>
+              </a:ext>
+            </a:extLst>
+          </p:cNvPr>
+          <p:cNvCxnSpPr>
+            <a:cxnSpLocks/>
+            <a:stCxn id="36" idx="3"/>
+            <a:endCxn id="37" idx="3"/>
+          </p:cNvCxnSpPr>
+          <p:nvPr/>
+        </p:nvCxnSpPr>
+        <p:spPr>
+          <a:xfrm flipV="1">
+            <a:off x="2439145" y="5525753"/>
+            <a:ext cx="127279" cy="127279"/>
+          </a:xfrm>
+          <a:prstGeom prst="line">
+            <a:avLst/>
+          </a:prstGeom>
+          <a:solidFill>
+            <a:schemeClr val="bg1"/>
+          </a:solidFill>
+          <a:ln w="19050">
+            <a:solidFill>
+              <a:srgbClr val="00B050"/>
+            </a:solidFill>
+          </a:ln>
+        </p:spPr>
+        <p:style>
+          <a:lnRef idx="2">
+            <a:schemeClr val="accent1">
+              <a:shade val="50000"/>
+            </a:schemeClr>
+          </a:lnRef>
+          <a:fillRef idx="1">
+            <a:schemeClr val="accent1"/>
+          </a:fillRef>
+          <a:effectRef idx="0">
+            <a:schemeClr val="accent1"/>
+          </a:effectRef>
+          <a:fontRef idx="minor">
+            <a:schemeClr val="lt1"/>
+          </a:fontRef>
+        </p:style>
+      </p:cxnSp>
+      <p:cxnSp>
+        <p:nvCxnSpPr>
+          <p:cNvPr id="65" name="Connecteur droit 64">
+            <a:extLst>
+              <a:ext uri="{FF2B5EF4-FFF2-40B4-BE49-F238E27FC236}">
+                <a16:creationId xmlns:a16="http://schemas.microsoft.com/office/drawing/2014/main" id="{42543397-24CB-C0E7-7F31-B6AF526CB788}"/>
+              </a:ext>
+            </a:extLst>
+          </p:cNvPr>
+          <p:cNvCxnSpPr>
+            <a:cxnSpLocks/>
+            <a:stCxn id="34" idx="1"/>
+            <a:endCxn id="33" idx="1"/>
+          </p:cNvCxnSpPr>
+          <p:nvPr/>
+        </p:nvCxnSpPr>
+        <p:spPr>
+          <a:xfrm flipH="1" flipV="1">
+            <a:off x="2439145" y="492450"/>
+            <a:ext cx="127279" cy="127279"/>
+          </a:xfrm>
+          <a:prstGeom prst="line">
+            <a:avLst/>
+          </a:prstGeom>
+          <a:solidFill>
+            <a:schemeClr val="bg1"/>
+          </a:solidFill>
+          <a:ln w="19050">
+            <a:solidFill>
+              <a:srgbClr val="00B050"/>
+            </a:solidFill>
+          </a:ln>
+        </p:spPr>
+        <p:style>
+          <a:lnRef idx="2">
+            <a:schemeClr val="accent1">
+              <a:shade val="50000"/>
+            </a:schemeClr>
+          </a:lnRef>
+          <a:fillRef idx="1">
+            <a:schemeClr val="accent1"/>
+          </a:fillRef>
+          <a:effectRef idx="0">
+            <a:schemeClr val="accent1"/>
+          </a:effectRef>
+          <a:fontRef idx="minor">
+            <a:schemeClr val="lt1"/>
+          </a:fontRef>
+        </p:style>
+      </p:cxnSp>
+      <mc:AlternateContent xmlns:mc="http://schemas.openxmlformats.org/markup-compatibility/2006" xmlns:a14="http://schemas.microsoft.com/office/drawing/2010/main">
+        <mc:Choice Requires="a14">
+          <p:sp>
+            <p:nvSpPr>
+              <p:cNvPr id="77" name="ZoneTexte 76">
+                <a:extLst>
+                  <a:ext uri="{FF2B5EF4-FFF2-40B4-BE49-F238E27FC236}">
+                    <a16:creationId xmlns:a16="http://schemas.microsoft.com/office/drawing/2014/main" id="{78D19721-C5A9-17FF-0541-EE2137DECB4F}"/>
+                  </a:ext>
+                </a:extLst>
+              </p:cNvPr>
+              <p:cNvSpPr txBox="1"/>
+              <p:nvPr/>
+            </p:nvSpPr>
+            <p:spPr>
+              <a:xfrm>
+                <a:off x="9866011" y="544869"/>
+                <a:ext cx="455574" cy="276999"/>
+              </a:xfrm>
+              <a:prstGeom prst="rect">
+                <a:avLst/>
+              </a:prstGeom>
+              <a:noFill/>
+            </p:spPr>
+            <p:txBody>
+              <a:bodyPr wrap="none" lIns="0" tIns="0" rIns="0" bIns="0" rtlCol="0">
+                <a:spAutoFit/>
+              </a:bodyPr>
+              <a:lstStyle/>
+              <a:p>
+                <a:pPr/>
+                <a14:m>
+                  <m:oMathPara xmlns:m="http://schemas.openxmlformats.org/officeDocument/2006/math">
+                    <m:oMathParaPr>
+                      <m:jc m:val="centerGroup"/>
+                    </m:oMathParaPr>
+                    <m:oMath xmlns:m="http://schemas.openxmlformats.org/officeDocument/2006/math">
+                      <m:sSub>
+                        <m:sSubPr>
+                          <m:ctrlPr>
+                            <a:rPr lang="fr-FR" b="0" i="1" smtClean="0">
+                              <a:latin typeface="Cambria Math" panose="02040503050406030204" pitchFamily="18" charset="0"/>
+                            </a:rPr>
+                          </m:ctrlPr>
+                        </m:sSubPr>
+                        <m:e>
+                          <m:r>
+                            <a:rPr lang="fr-FR" b="0" i="1" smtClean="0">
+                              <a:latin typeface="Cambria Math" panose="02040503050406030204" pitchFamily="18" charset="0"/>
+                            </a:rPr>
+                            <m:t>𝐵</m:t>
+                          </m:r>
+                        </m:e>
+                        <m:sub>
+                          <m:r>
+                            <a:rPr lang="fr-FR" b="0" i="1" smtClean="0">
+                              <a:latin typeface="Cambria Math" panose="02040503050406030204" pitchFamily="18" charset="0"/>
+                            </a:rPr>
+                            <m:t>𝐻𝐷</m:t>
+                          </m:r>
+                        </m:sub>
+                      </m:sSub>
+                    </m:oMath>
+                  </m:oMathPara>
+                </a14:m>
+                <a:endParaRPr lang="fr-FR" dirty="0"/>
+              </a:p>
+            </p:txBody>
+          </p:sp>
+        </mc:Choice>
+        <mc:Fallback xmlns="">
+          <p:sp>
+            <p:nvSpPr>
+              <p:cNvPr id="77" name="ZoneTexte 76">
+                <a:extLst>
+                  <a:ext uri="{FF2B5EF4-FFF2-40B4-BE49-F238E27FC236}">
+                    <a16:creationId xmlns:a16="http://schemas.microsoft.com/office/drawing/2014/main" id="{48F850B8-3CB3-F3F4-CA64-8745AF91F784}"/>
+                  </a:ext>
+                </a:extLst>
+              </p:cNvPr>
+              <p:cNvSpPr txBox="1">
+                <a:spLocks noRot="1" noChangeAspect="1" noMove="1" noResize="1" noEditPoints="1" noAdjustHandles="1" noChangeArrowheads="1" noChangeShapeType="1" noTextEdit="1"/>
+              </p:cNvSpPr>
+              <p:nvPr/>
+            </p:nvSpPr>
+            <p:spPr>
+              <a:xfrm>
+                <a:off x="9866011" y="544869"/>
+                <a:ext cx="455574" cy="276999"/>
+              </a:xfrm>
+              <a:prstGeom prst="rect">
+                <a:avLst/>
+              </a:prstGeom>
+              <a:blipFill>
+                <a:blip r:embed="rId2"/>
+                <a:stretch>
+                  <a:fillRect l="-10667" r="-5333" b="-15217"/>
+                </a:stretch>
+              </a:blipFill>
+            </p:spPr>
+            <p:txBody>
+              <a:bodyPr/>
+              <a:lstStyle/>
+              <a:p>
+                <a:r>
+                  <a:rPr lang="fr-FR">
+                    <a:noFill/>
+                  </a:rPr>
+                  <a:t> </a:t>
+                </a:r>
+              </a:p>
+            </p:txBody>
+          </p:sp>
+        </mc:Fallback>
+      </mc:AlternateContent>
+      <mc:AlternateContent xmlns:mc="http://schemas.openxmlformats.org/markup-compatibility/2006" xmlns:a14="http://schemas.microsoft.com/office/drawing/2010/main">
+        <mc:Choice Requires="a14">
+          <p:sp>
+            <p:nvSpPr>
+              <p:cNvPr id="78" name="ZoneTexte 77">
+                <a:extLst>
+                  <a:ext uri="{FF2B5EF4-FFF2-40B4-BE49-F238E27FC236}">
+                    <a16:creationId xmlns:a16="http://schemas.microsoft.com/office/drawing/2014/main" id="{5461E929-19B5-C5D0-BE58-D368B47698AD}"/>
+                  </a:ext>
+                </a:extLst>
+              </p:cNvPr>
+              <p:cNvSpPr txBox="1"/>
+              <p:nvPr/>
+            </p:nvSpPr>
+            <p:spPr>
+              <a:xfrm>
+                <a:off x="9322660" y="78184"/>
+                <a:ext cx="437749" cy="276999"/>
+              </a:xfrm>
+              <a:prstGeom prst="rect">
+                <a:avLst/>
+              </a:prstGeom>
+              <a:noFill/>
+            </p:spPr>
+            <p:txBody>
+              <a:bodyPr wrap="none" lIns="0" tIns="0" rIns="0" bIns="0" rtlCol="0">
+                <a:spAutoFit/>
+              </a:bodyPr>
+              <a:lstStyle/>
+              <a:p>
+                <a:pPr/>
+                <a14:m>
+                  <m:oMathPara xmlns:m="http://schemas.openxmlformats.org/officeDocument/2006/math">
+                    <m:oMathParaPr>
+                      <m:jc m:val="centerGroup"/>
+                    </m:oMathParaPr>
+                    <m:oMath xmlns:m="http://schemas.openxmlformats.org/officeDocument/2006/math">
+                      <m:sSub>
+                        <m:sSubPr>
+                          <m:ctrlPr>
+                            <a:rPr lang="fr-FR" b="0" i="1" smtClean="0">
+                              <a:latin typeface="Cambria Math" panose="02040503050406030204" pitchFamily="18" charset="0"/>
+                            </a:rPr>
+                          </m:ctrlPr>
+                        </m:sSubPr>
+                        <m:e>
+                          <m:r>
+                            <a:rPr lang="fr-FR" b="0" i="1" smtClean="0">
+                              <a:latin typeface="Cambria Math" panose="02040503050406030204" pitchFamily="18" charset="0"/>
+                            </a:rPr>
+                            <m:t>𝐶</m:t>
+                          </m:r>
+                        </m:e>
+                        <m:sub>
+                          <m:r>
+                            <a:rPr lang="fr-FR" b="0" i="1" smtClean="0">
+                              <a:latin typeface="Cambria Math" panose="02040503050406030204" pitchFamily="18" charset="0"/>
+                            </a:rPr>
+                            <m:t>𝐻𝐷</m:t>
+                          </m:r>
+                        </m:sub>
+                      </m:sSub>
+                    </m:oMath>
+                  </m:oMathPara>
+                </a14:m>
+                <a:endParaRPr lang="fr-FR" dirty="0"/>
+              </a:p>
+            </p:txBody>
+          </p:sp>
+        </mc:Choice>
+        <mc:Fallback xmlns="">
+          <p:sp>
+            <p:nvSpPr>
+              <p:cNvPr id="78" name="ZoneTexte 77">
+                <a:extLst>
+                  <a:ext uri="{FF2B5EF4-FFF2-40B4-BE49-F238E27FC236}">
+                    <a16:creationId xmlns:a16="http://schemas.microsoft.com/office/drawing/2014/main" id="{7905450E-B111-2694-28E1-42F3771697D9}"/>
+                  </a:ext>
+                </a:extLst>
+              </p:cNvPr>
+              <p:cNvSpPr txBox="1">
+                <a:spLocks noRot="1" noChangeAspect="1" noMove="1" noResize="1" noEditPoints="1" noAdjustHandles="1" noChangeArrowheads="1" noChangeShapeType="1" noTextEdit="1"/>
+              </p:cNvSpPr>
+              <p:nvPr/>
+            </p:nvSpPr>
+            <p:spPr>
+              <a:xfrm>
+                <a:off x="9322660" y="78184"/>
+                <a:ext cx="437749" cy="276999"/>
+              </a:xfrm>
+              <a:prstGeom prst="rect">
+                <a:avLst/>
+              </a:prstGeom>
+              <a:blipFill>
+                <a:blip r:embed="rId3"/>
+                <a:stretch>
+                  <a:fillRect l="-11111" r="-5556" b="-15556"/>
+                </a:stretch>
+              </a:blipFill>
+            </p:spPr>
+            <p:txBody>
+              <a:bodyPr/>
+              <a:lstStyle/>
+              <a:p>
+                <a:r>
+                  <a:rPr lang="fr-FR">
+                    <a:noFill/>
+                  </a:rPr>
+                  <a:t> </a:t>
+                </a:r>
+              </a:p>
+            </p:txBody>
+          </p:sp>
+        </mc:Fallback>
+      </mc:AlternateContent>
+      <p:cxnSp>
+        <p:nvCxnSpPr>
+          <p:cNvPr id="82" name="Connecteur droit 81">
+            <a:extLst>
+              <a:ext uri="{FF2B5EF4-FFF2-40B4-BE49-F238E27FC236}">
+                <a16:creationId xmlns:a16="http://schemas.microsoft.com/office/drawing/2014/main" id="{D53090DD-5C09-33E9-F7E0-01F12F33A5A8}"/>
+              </a:ext>
+            </a:extLst>
+          </p:cNvPr>
+          <p:cNvCxnSpPr>
+            <a:cxnSpLocks/>
+            <a:stCxn id="25" idx="1"/>
+            <a:endCxn id="33" idx="7"/>
+          </p:cNvCxnSpPr>
+          <p:nvPr/>
+        </p:nvCxnSpPr>
+        <p:spPr>
+          <a:xfrm flipH="1" flipV="1">
+            <a:off x="2820983" y="492450"/>
+            <a:ext cx="2766899" cy="3185159"/>
+          </a:xfrm>
+          <a:prstGeom prst="line">
+            <a:avLst/>
+          </a:prstGeom>
+          <a:ln w="9525">
+            <a:solidFill>
+              <a:srgbClr val="7030A0"/>
+            </a:solidFill>
+          </a:ln>
+        </p:spPr>
+        <p:style>
+          <a:lnRef idx="1">
+            <a:schemeClr val="accent1"/>
+          </a:lnRef>
+          <a:fillRef idx="0">
+            <a:schemeClr val="accent1"/>
+          </a:fillRef>
+          <a:effectRef idx="0">
+            <a:schemeClr val="accent1"/>
+          </a:effectRef>
+          <a:fontRef idx="minor">
+            <a:schemeClr val="tx1"/>
+          </a:fontRef>
+        </p:style>
+      </p:cxnSp>
+      <p:cxnSp>
+        <p:nvCxnSpPr>
+          <p:cNvPr id="85" name="Connecteur droit 84">
+            <a:extLst>
+              <a:ext uri="{FF2B5EF4-FFF2-40B4-BE49-F238E27FC236}">
+                <a16:creationId xmlns:a16="http://schemas.microsoft.com/office/drawing/2014/main" id="{C8D76537-F0E6-8FAF-2E66-5BD9EC22845C}"/>
+              </a:ext>
+            </a:extLst>
+          </p:cNvPr>
+          <p:cNvCxnSpPr>
+            <a:cxnSpLocks/>
+            <a:stCxn id="27" idx="3"/>
+            <a:endCxn id="36" idx="5"/>
+          </p:cNvCxnSpPr>
+          <p:nvPr/>
+        </p:nvCxnSpPr>
+        <p:spPr>
+          <a:xfrm flipH="1">
+            <a:off x="2820983" y="4090538"/>
+            <a:ext cx="2766899" cy="1562494"/>
+          </a:xfrm>
+          <a:prstGeom prst="line">
+            <a:avLst/>
+          </a:prstGeom>
+          <a:ln w="9525">
+            <a:solidFill>
+              <a:srgbClr val="7030A0"/>
+            </a:solidFill>
+          </a:ln>
+        </p:spPr>
+        <p:style>
+          <a:lnRef idx="1">
+            <a:schemeClr val="accent1"/>
+          </a:lnRef>
+          <a:fillRef idx="0">
+            <a:schemeClr val="accent1"/>
+          </a:fillRef>
+          <a:effectRef idx="0">
+            <a:schemeClr val="accent1"/>
+          </a:effectRef>
+          <a:fontRef idx="minor">
+            <a:schemeClr val="tx1"/>
+          </a:fontRef>
+        </p:style>
+      </p:cxnSp>
+      <p:cxnSp>
+        <p:nvCxnSpPr>
+          <p:cNvPr id="89" name="Connecteur droit 88">
+            <a:extLst>
+              <a:ext uri="{FF2B5EF4-FFF2-40B4-BE49-F238E27FC236}">
+                <a16:creationId xmlns:a16="http://schemas.microsoft.com/office/drawing/2014/main" id="{BBF5DD77-8EE2-B76A-0802-04BDB1900D7D}"/>
+              </a:ext>
+            </a:extLst>
+          </p:cNvPr>
+          <p:cNvCxnSpPr>
+            <a:cxnSpLocks/>
+            <a:stCxn id="28" idx="5"/>
+            <a:endCxn id="38" idx="3"/>
+          </p:cNvCxnSpPr>
+          <p:nvPr/>
+        </p:nvCxnSpPr>
+        <p:spPr>
+          <a:xfrm>
+            <a:off x="6607337" y="4090538"/>
+            <a:ext cx="2780558" cy="1562494"/>
+          </a:xfrm>
+          <a:prstGeom prst="line">
+            <a:avLst/>
+          </a:prstGeom>
+          <a:ln w="9525">
+            <a:solidFill>
+              <a:srgbClr val="7030A0"/>
+            </a:solidFill>
+          </a:ln>
+        </p:spPr>
+        <p:style>
+          <a:lnRef idx="1">
+            <a:schemeClr val="accent1"/>
+          </a:lnRef>
+          <a:fillRef idx="0">
+            <a:schemeClr val="accent1"/>
+          </a:fillRef>
+          <a:effectRef idx="0">
+            <a:schemeClr val="accent1"/>
+          </a:effectRef>
+          <a:fontRef idx="minor">
+            <a:schemeClr val="tx1"/>
+          </a:fontRef>
+        </p:style>
+      </p:cxnSp>
+      <mc:AlternateContent xmlns:mc="http://schemas.openxmlformats.org/markup-compatibility/2006" xmlns:a14="http://schemas.microsoft.com/office/drawing/2010/main">
+        <mc:Choice Requires="a14">
+          <p:sp>
+            <p:nvSpPr>
+              <p:cNvPr id="93" name="ZoneTexte 92">
+                <a:extLst>
+                  <a:ext uri="{FF2B5EF4-FFF2-40B4-BE49-F238E27FC236}">
+                    <a16:creationId xmlns:a16="http://schemas.microsoft.com/office/drawing/2014/main" id="{D12B159D-1C4B-8C3B-427B-C015C787ACB9}"/>
+                  </a:ext>
+                </a:extLst>
+              </p:cNvPr>
+              <p:cNvSpPr txBox="1"/>
+              <p:nvPr/>
+            </p:nvSpPr>
+            <p:spPr>
+              <a:xfrm>
+                <a:off x="6262209" y="3290500"/>
+                <a:ext cx="459293" cy="276999"/>
+              </a:xfrm>
+              <a:prstGeom prst="rect">
+                <a:avLst/>
+              </a:prstGeom>
+              <a:noFill/>
+            </p:spPr>
+            <p:txBody>
+              <a:bodyPr wrap="none" lIns="0" tIns="0" rIns="0" bIns="0" rtlCol="0">
+                <a:spAutoFit/>
+              </a:bodyPr>
+              <a:lstStyle/>
+              <a:p>
+                <a:pPr/>
+                <a14:m>
+                  <m:oMathPara xmlns:m="http://schemas.openxmlformats.org/officeDocument/2006/math">
+                    <m:oMathParaPr>
+                      <m:jc m:val="centerGroup"/>
+                    </m:oMathParaPr>
+                    <m:oMath xmlns:m="http://schemas.openxmlformats.org/officeDocument/2006/math">
+                      <m:sSub>
+                        <m:sSubPr>
+                          <m:ctrlPr>
+                            <a:rPr lang="fr-FR" b="0" i="1" smtClean="0">
+                              <a:latin typeface="Cambria Math" panose="02040503050406030204" pitchFamily="18" charset="0"/>
+                            </a:rPr>
+                          </m:ctrlPr>
+                        </m:sSubPr>
+                        <m:e>
+                          <m:r>
+                            <a:rPr lang="fr-FR" b="0" i="1" smtClean="0">
+                              <a:latin typeface="Cambria Math" panose="02040503050406030204" pitchFamily="18" charset="0"/>
+                            </a:rPr>
+                            <m:t>𝐴</m:t>
+                          </m:r>
+                        </m:e>
+                        <m:sub>
+                          <m:r>
+                            <a:rPr lang="fr-FR" b="0" i="1" smtClean="0">
+                              <a:latin typeface="Cambria Math" panose="02040503050406030204" pitchFamily="18" charset="0"/>
+                            </a:rPr>
+                            <m:t>𝐻𝐷</m:t>
+                          </m:r>
+                        </m:sub>
+                      </m:sSub>
+                    </m:oMath>
+                  </m:oMathPara>
+                </a14:m>
+                <a:endParaRPr lang="fr-FR" dirty="0"/>
+              </a:p>
+            </p:txBody>
+          </p:sp>
+        </mc:Choice>
+        <mc:Fallback xmlns="">
+          <p:sp>
+            <p:nvSpPr>
+              <p:cNvPr id="93" name="ZoneTexte 92">
+                <a:extLst>
+                  <a:ext uri="{FF2B5EF4-FFF2-40B4-BE49-F238E27FC236}">
+                    <a16:creationId xmlns:a16="http://schemas.microsoft.com/office/drawing/2014/main" id="{63E4D1E3-B5EF-B965-324F-CE2A687E2DCF}"/>
+                  </a:ext>
+                </a:extLst>
+              </p:cNvPr>
+              <p:cNvSpPr txBox="1">
+                <a:spLocks noRot="1" noChangeAspect="1" noMove="1" noResize="1" noEditPoints="1" noAdjustHandles="1" noChangeArrowheads="1" noChangeShapeType="1" noTextEdit="1"/>
+              </p:cNvSpPr>
+              <p:nvPr/>
+            </p:nvSpPr>
+            <p:spPr>
+              <a:xfrm>
+                <a:off x="6262209" y="3290500"/>
+                <a:ext cx="459293" cy="276999"/>
+              </a:xfrm>
+              <a:prstGeom prst="rect">
+                <a:avLst/>
+              </a:prstGeom>
+              <a:blipFill>
+                <a:blip r:embed="rId4"/>
+                <a:stretch>
+                  <a:fillRect l="-10526" r="-3947" b="-15556"/>
+                </a:stretch>
+              </a:blipFill>
+            </p:spPr>
+            <p:txBody>
+              <a:bodyPr/>
+              <a:lstStyle/>
+              <a:p>
+                <a:r>
+                  <a:rPr lang="fr-FR">
+                    <a:noFill/>
+                  </a:rPr>
+                  <a:t> </a:t>
+                </a:r>
+              </a:p>
+            </p:txBody>
+          </p:sp>
+        </mc:Fallback>
+      </mc:AlternateContent>
+      <p:grpSp>
+        <p:nvGrpSpPr>
+          <p:cNvPr id="131" name="Groupe 130">
+            <a:extLst>
+              <a:ext uri="{FF2B5EF4-FFF2-40B4-BE49-F238E27FC236}">
+                <a16:creationId xmlns:a16="http://schemas.microsoft.com/office/drawing/2014/main" id="{BD2B9E70-5E2B-E570-80FC-F26B22B6E05B}"/>
+              </a:ext>
+            </a:extLst>
+          </p:cNvPr>
+          <p:cNvGrpSpPr/>
+          <p:nvPr/>
+        </p:nvGrpSpPr>
+        <p:grpSpPr>
+          <a:xfrm>
+            <a:off x="2606758" y="1090333"/>
+            <a:ext cx="6982485" cy="4104195"/>
+            <a:chOff x="2606758" y="1090333"/>
+            <a:chExt cx="6982485" cy="4104195"/>
+          </a:xfrm>
+        </p:grpSpPr>
+        <p:grpSp>
+          <p:nvGrpSpPr>
+            <p:cNvPr id="100" name="Groupe 99">
+              <a:extLst>
+                <a:ext uri="{FF2B5EF4-FFF2-40B4-BE49-F238E27FC236}">
+                  <a16:creationId xmlns:a16="http://schemas.microsoft.com/office/drawing/2014/main" id="{08CE1835-9EDA-3FB8-DD99-D0EC399C55E2}"/>
+                </a:ext>
+              </a:extLst>
+            </p:cNvPr>
+            <p:cNvGrpSpPr/>
+            <p:nvPr/>
+          </p:nvGrpSpPr>
+          <p:grpSpPr>
+            <a:xfrm>
+              <a:off x="2606758" y="4546528"/>
+              <a:ext cx="6982485" cy="648000"/>
+              <a:chOff x="2606758" y="4546528"/>
+              <a:chExt cx="6982485" cy="648000"/>
+            </a:xfrm>
+          </p:grpSpPr>
+          <p:sp>
+            <p:nvSpPr>
+              <p:cNvPr id="95" name="Rectangle : coins arrondis 94">
+                <a:extLst>
+                  <a:ext uri="{FF2B5EF4-FFF2-40B4-BE49-F238E27FC236}">
+                    <a16:creationId xmlns:a16="http://schemas.microsoft.com/office/drawing/2014/main" id="{DB1F9456-712C-0D3B-A63C-981B346B23B0}"/>
+                  </a:ext>
+                </a:extLst>
+              </p:cNvPr>
+              <p:cNvSpPr/>
+              <p:nvPr/>
+            </p:nvSpPr>
+            <p:spPr>
+              <a:xfrm>
+                <a:off x="5486000" y="4546528"/>
+                <a:ext cx="1224000" cy="648000"/>
+              </a:xfrm>
+              <a:prstGeom prst="roundRect">
+                <a:avLst>
+                  <a:gd name="adj" fmla="val 11155"/>
+                </a:avLst>
+              </a:prstGeom>
+              <a:noFill/>
+              <a:ln w="9525">
+                <a:solidFill>
+                  <a:schemeClr val="bg1">
+                    <a:lumMod val="85000"/>
+                  </a:schemeClr>
+                </a:solidFill>
+                <a:prstDash val="sysDash"/>
+              </a:ln>
+            </p:spPr>
+            <p:style>
+              <a:lnRef idx="2">
+                <a:schemeClr val="accent1">
+                  <a:shade val="50000"/>
+                </a:schemeClr>
+              </a:lnRef>
+              <a:fillRef idx="1">
+                <a:schemeClr val="accent1"/>
+              </a:fillRef>
+              <a:effectRef idx="0">
+                <a:schemeClr val="accent1"/>
+              </a:effectRef>
+              <a:fontRef idx="minor">
+                <a:schemeClr val="lt1"/>
+              </a:fontRef>
+            </p:style>
+            <p:txBody>
+              <a:bodyPr rtlCol="0" anchor="ctr"/>
+              <a:lstStyle/>
+              <a:p>
+                <a:pPr algn="ctr"/>
+                <a:endParaRPr lang="fr-FR" dirty="0"/>
+              </a:p>
+            </p:txBody>
+          </p:sp>
+          <p:sp>
+            <p:nvSpPr>
+              <p:cNvPr id="96" name="Rectangle : coins arrondis 95">
+                <a:extLst>
+                  <a:ext uri="{FF2B5EF4-FFF2-40B4-BE49-F238E27FC236}">
+                    <a16:creationId xmlns:a16="http://schemas.microsoft.com/office/drawing/2014/main" id="{2362BDD6-1EEB-86C1-485B-31F22CAEDD07}"/>
+                  </a:ext>
+                </a:extLst>
+              </p:cNvPr>
+              <p:cNvSpPr/>
+              <p:nvPr/>
+            </p:nvSpPr>
+            <p:spPr>
+              <a:xfrm>
+                <a:off x="4046379" y="4546528"/>
+                <a:ext cx="1224000" cy="648000"/>
+              </a:xfrm>
+              <a:prstGeom prst="roundRect">
+                <a:avLst>
+                  <a:gd name="adj" fmla="val 11155"/>
+                </a:avLst>
+              </a:prstGeom>
+              <a:noFill/>
+              <a:ln w="9525">
+                <a:solidFill>
+                  <a:schemeClr val="bg1">
+                    <a:lumMod val="85000"/>
+                  </a:schemeClr>
+                </a:solidFill>
+                <a:prstDash val="sysDash"/>
+              </a:ln>
+            </p:spPr>
+            <p:style>
+              <a:lnRef idx="2">
+                <a:schemeClr val="accent1">
+                  <a:shade val="50000"/>
+                </a:schemeClr>
+              </a:lnRef>
+              <a:fillRef idx="1">
+                <a:schemeClr val="accent1"/>
+              </a:fillRef>
+              <a:effectRef idx="0">
+                <a:schemeClr val="accent1"/>
+              </a:effectRef>
+              <a:fontRef idx="minor">
+                <a:schemeClr val="lt1"/>
+              </a:fontRef>
+            </p:style>
+            <p:txBody>
+              <a:bodyPr rtlCol="0" anchor="ctr"/>
+              <a:lstStyle/>
+              <a:p>
+                <a:pPr algn="ctr"/>
+                <a:endParaRPr lang="fr-FR" dirty="0"/>
+              </a:p>
+            </p:txBody>
+          </p:sp>
+          <p:sp>
+            <p:nvSpPr>
+              <p:cNvPr id="97" name="Rectangle : coins arrondis 96">
+                <a:extLst>
+                  <a:ext uri="{FF2B5EF4-FFF2-40B4-BE49-F238E27FC236}">
+                    <a16:creationId xmlns:a16="http://schemas.microsoft.com/office/drawing/2014/main" id="{87DA96A7-C72B-6814-C714-C10DCC732485}"/>
+                  </a:ext>
+                </a:extLst>
+              </p:cNvPr>
+              <p:cNvSpPr/>
+              <p:nvPr/>
+            </p:nvSpPr>
+            <p:spPr>
+              <a:xfrm>
+                <a:off x="2606758" y="4546528"/>
+                <a:ext cx="1224000" cy="648000"/>
+              </a:xfrm>
+              <a:prstGeom prst="roundRect">
+                <a:avLst>
+                  <a:gd name="adj" fmla="val 11155"/>
+                </a:avLst>
+              </a:prstGeom>
+              <a:noFill/>
+              <a:ln w="9525">
+                <a:solidFill>
+                  <a:schemeClr val="bg1">
+                    <a:lumMod val="85000"/>
+                  </a:schemeClr>
+                </a:solidFill>
+                <a:prstDash val="sysDash"/>
+              </a:ln>
+            </p:spPr>
+            <p:style>
+              <a:lnRef idx="2">
+                <a:schemeClr val="accent1">
+                  <a:shade val="50000"/>
+                </a:schemeClr>
+              </a:lnRef>
+              <a:fillRef idx="1">
+                <a:schemeClr val="accent1"/>
+              </a:fillRef>
+              <a:effectRef idx="0">
+                <a:schemeClr val="accent1"/>
+              </a:effectRef>
+              <a:fontRef idx="minor">
+                <a:schemeClr val="lt1"/>
+              </a:fontRef>
+            </p:style>
+            <p:txBody>
+              <a:bodyPr rtlCol="0" anchor="ctr"/>
+              <a:lstStyle/>
+              <a:p>
+                <a:pPr algn="ctr"/>
+                <a:endParaRPr lang="fr-FR" dirty="0"/>
+              </a:p>
+            </p:txBody>
+          </p:sp>
+          <p:sp>
+            <p:nvSpPr>
+              <p:cNvPr id="98" name="Rectangle : coins arrondis 97">
+                <a:extLst>
+                  <a:ext uri="{FF2B5EF4-FFF2-40B4-BE49-F238E27FC236}">
+                    <a16:creationId xmlns:a16="http://schemas.microsoft.com/office/drawing/2014/main" id="{1105CB10-19AD-E987-3D30-64B2C1D82B0C}"/>
+                  </a:ext>
+                </a:extLst>
+              </p:cNvPr>
+              <p:cNvSpPr/>
+              <p:nvPr/>
+            </p:nvSpPr>
+            <p:spPr>
+              <a:xfrm>
+                <a:off x="6925621" y="4546528"/>
+                <a:ext cx="1224000" cy="648000"/>
+              </a:xfrm>
+              <a:prstGeom prst="roundRect">
+                <a:avLst>
+                  <a:gd name="adj" fmla="val 11155"/>
+                </a:avLst>
+              </a:prstGeom>
+              <a:noFill/>
+              <a:ln w="9525">
+                <a:solidFill>
+                  <a:schemeClr val="bg1">
+                    <a:lumMod val="85000"/>
+                  </a:schemeClr>
+                </a:solidFill>
+                <a:prstDash val="sysDash"/>
+              </a:ln>
+            </p:spPr>
+            <p:style>
+              <a:lnRef idx="2">
+                <a:schemeClr val="accent1">
+                  <a:shade val="50000"/>
+                </a:schemeClr>
+              </a:lnRef>
+              <a:fillRef idx="1">
+                <a:schemeClr val="accent1"/>
+              </a:fillRef>
+              <a:effectRef idx="0">
+                <a:schemeClr val="accent1"/>
+              </a:effectRef>
+              <a:fontRef idx="minor">
+                <a:schemeClr val="lt1"/>
+              </a:fontRef>
+            </p:style>
+            <p:txBody>
+              <a:bodyPr rtlCol="0" anchor="ctr"/>
+              <a:lstStyle/>
+              <a:p>
+                <a:pPr algn="ctr"/>
+                <a:endParaRPr lang="fr-FR" dirty="0"/>
+              </a:p>
+            </p:txBody>
+          </p:sp>
+          <p:sp>
+            <p:nvSpPr>
+              <p:cNvPr id="99" name="Rectangle : coins arrondis 98">
+                <a:extLst>
+                  <a:ext uri="{FF2B5EF4-FFF2-40B4-BE49-F238E27FC236}">
+                    <a16:creationId xmlns:a16="http://schemas.microsoft.com/office/drawing/2014/main" id="{AAC930A7-E40B-03EE-1B29-750D968A69FC}"/>
+                  </a:ext>
+                </a:extLst>
+              </p:cNvPr>
+              <p:cNvSpPr/>
+              <p:nvPr/>
+            </p:nvSpPr>
+            <p:spPr>
+              <a:xfrm>
+                <a:off x="8365243" y="4546528"/>
+                <a:ext cx="1224000" cy="648000"/>
+              </a:xfrm>
+              <a:prstGeom prst="roundRect">
+                <a:avLst>
+                  <a:gd name="adj" fmla="val 11155"/>
+                </a:avLst>
+              </a:prstGeom>
+              <a:noFill/>
+              <a:ln w="9525">
+                <a:solidFill>
+                  <a:schemeClr val="bg1">
+                    <a:lumMod val="85000"/>
+                  </a:schemeClr>
+                </a:solidFill>
+                <a:prstDash val="sysDash"/>
+              </a:ln>
+            </p:spPr>
+            <p:style>
+              <a:lnRef idx="2">
+                <a:schemeClr val="accent1">
+                  <a:shade val="50000"/>
+                </a:schemeClr>
+              </a:lnRef>
+              <a:fillRef idx="1">
+                <a:schemeClr val="accent1"/>
+              </a:fillRef>
+              <a:effectRef idx="0">
+                <a:schemeClr val="accent1"/>
+              </a:effectRef>
+              <a:fontRef idx="minor">
+                <a:schemeClr val="lt1"/>
+              </a:fontRef>
+            </p:style>
+            <p:txBody>
+              <a:bodyPr rtlCol="0" anchor="ctr"/>
+              <a:lstStyle/>
+              <a:p>
+                <a:pPr algn="ctr"/>
+                <a:endParaRPr lang="fr-FR" dirty="0"/>
+              </a:p>
+            </p:txBody>
+          </p:sp>
+        </p:grpSp>
+        <p:grpSp>
+          <p:nvGrpSpPr>
+            <p:cNvPr id="101" name="Groupe 100">
+              <a:extLst>
+                <a:ext uri="{FF2B5EF4-FFF2-40B4-BE49-F238E27FC236}">
+                  <a16:creationId xmlns:a16="http://schemas.microsoft.com/office/drawing/2014/main" id="{D623A258-7A6E-B618-52AD-77B9378BAB54}"/>
+                </a:ext>
+              </a:extLst>
+            </p:cNvPr>
+            <p:cNvGrpSpPr/>
+            <p:nvPr/>
+          </p:nvGrpSpPr>
+          <p:grpSpPr>
+            <a:xfrm>
+              <a:off x="2606758" y="3855289"/>
+              <a:ext cx="6982485" cy="648000"/>
+              <a:chOff x="2606758" y="4546528"/>
+              <a:chExt cx="6982485" cy="648000"/>
+            </a:xfrm>
+          </p:grpSpPr>
+          <p:sp>
+            <p:nvSpPr>
+              <p:cNvPr id="102" name="Rectangle : coins arrondis 101">
+                <a:extLst>
+                  <a:ext uri="{FF2B5EF4-FFF2-40B4-BE49-F238E27FC236}">
+                    <a16:creationId xmlns:a16="http://schemas.microsoft.com/office/drawing/2014/main" id="{8CAC47E7-C248-7365-3576-2D67226ADBE1}"/>
+                  </a:ext>
+                </a:extLst>
+              </p:cNvPr>
+              <p:cNvSpPr/>
+              <p:nvPr/>
+            </p:nvSpPr>
+            <p:spPr>
+              <a:xfrm>
+                <a:off x="5486000" y="4546528"/>
+                <a:ext cx="1224000" cy="648000"/>
+              </a:xfrm>
+              <a:prstGeom prst="roundRect">
+                <a:avLst>
+                  <a:gd name="adj" fmla="val 11155"/>
+                </a:avLst>
+              </a:prstGeom>
+              <a:noFill/>
+              <a:ln w="9525">
+                <a:solidFill>
+                  <a:schemeClr val="bg1">
+                    <a:lumMod val="85000"/>
+                  </a:schemeClr>
+                </a:solidFill>
+                <a:prstDash val="sysDash"/>
+              </a:ln>
+            </p:spPr>
+            <p:style>
+              <a:lnRef idx="2">
+                <a:schemeClr val="accent1">
+                  <a:shade val="50000"/>
+                </a:schemeClr>
+              </a:lnRef>
+              <a:fillRef idx="1">
+                <a:schemeClr val="accent1"/>
+              </a:fillRef>
+              <a:effectRef idx="0">
+                <a:schemeClr val="accent1"/>
+              </a:effectRef>
+              <a:fontRef idx="minor">
+                <a:schemeClr val="lt1"/>
+              </a:fontRef>
+            </p:style>
+            <p:txBody>
+              <a:bodyPr rtlCol="0" anchor="ctr"/>
+              <a:lstStyle/>
+              <a:p>
+                <a:pPr algn="ctr"/>
+                <a:endParaRPr lang="fr-FR" dirty="0"/>
+              </a:p>
+            </p:txBody>
+          </p:sp>
+          <p:sp>
+            <p:nvSpPr>
+              <p:cNvPr id="103" name="Rectangle : coins arrondis 102">
+                <a:extLst>
+                  <a:ext uri="{FF2B5EF4-FFF2-40B4-BE49-F238E27FC236}">
+                    <a16:creationId xmlns:a16="http://schemas.microsoft.com/office/drawing/2014/main" id="{E1D1816C-F035-50BD-2512-946C47FC39FC}"/>
+                  </a:ext>
+                </a:extLst>
+              </p:cNvPr>
+              <p:cNvSpPr/>
+              <p:nvPr/>
+            </p:nvSpPr>
+            <p:spPr>
+              <a:xfrm>
+                <a:off x="4046379" y="4546528"/>
+                <a:ext cx="1224000" cy="648000"/>
+              </a:xfrm>
+              <a:prstGeom prst="roundRect">
+                <a:avLst>
+                  <a:gd name="adj" fmla="val 11155"/>
+                </a:avLst>
+              </a:prstGeom>
+              <a:noFill/>
+              <a:ln w="9525">
+                <a:solidFill>
+                  <a:schemeClr val="bg1">
+                    <a:lumMod val="85000"/>
+                  </a:schemeClr>
+                </a:solidFill>
+                <a:prstDash val="sysDash"/>
+              </a:ln>
+            </p:spPr>
+            <p:style>
+              <a:lnRef idx="2">
+                <a:schemeClr val="accent1">
+                  <a:shade val="50000"/>
+                </a:schemeClr>
+              </a:lnRef>
+              <a:fillRef idx="1">
+                <a:schemeClr val="accent1"/>
+              </a:fillRef>
+              <a:effectRef idx="0">
+                <a:schemeClr val="accent1"/>
+              </a:effectRef>
+              <a:fontRef idx="minor">
+                <a:schemeClr val="lt1"/>
+              </a:fontRef>
+            </p:style>
+            <p:txBody>
+              <a:bodyPr rtlCol="0" anchor="ctr"/>
+              <a:lstStyle/>
+              <a:p>
+                <a:pPr algn="ctr"/>
+                <a:endParaRPr lang="fr-FR" dirty="0"/>
+              </a:p>
+            </p:txBody>
+          </p:sp>
+          <p:sp>
+            <p:nvSpPr>
+              <p:cNvPr id="104" name="Rectangle : coins arrondis 103">
+                <a:extLst>
+                  <a:ext uri="{FF2B5EF4-FFF2-40B4-BE49-F238E27FC236}">
+                    <a16:creationId xmlns:a16="http://schemas.microsoft.com/office/drawing/2014/main" id="{518E2185-881C-C75A-87F6-235650CA3532}"/>
+                  </a:ext>
+                </a:extLst>
+              </p:cNvPr>
+              <p:cNvSpPr/>
+              <p:nvPr/>
+            </p:nvSpPr>
+            <p:spPr>
+              <a:xfrm>
+                <a:off x="2606758" y="4546528"/>
+                <a:ext cx="1224000" cy="648000"/>
+              </a:xfrm>
+              <a:prstGeom prst="roundRect">
+                <a:avLst>
+                  <a:gd name="adj" fmla="val 11155"/>
+                </a:avLst>
+              </a:prstGeom>
+              <a:noFill/>
+              <a:ln w="9525">
+                <a:solidFill>
+                  <a:schemeClr val="bg1">
+                    <a:lumMod val="85000"/>
+                  </a:schemeClr>
+                </a:solidFill>
+                <a:prstDash val="sysDash"/>
+              </a:ln>
+            </p:spPr>
+            <p:style>
+              <a:lnRef idx="2">
+                <a:schemeClr val="accent1">
+                  <a:shade val="50000"/>
+                </a:schemeClr>
+              </a:lnRef>
+              <a:fillRef idx="1">
+                <a:schemeClr val="accent1"/>
+              </a:fillRef>
+              <a:effectRef idx="0">
+                <a:schemeClr val="accent1"/>
+              </a:effectRef>
+              <a:fontRef idx="minor">
+                <a:schemeClr val="lt1"/>
+              </a:fontRef>
+            </p:style>
+            <p:txBody>
+              <a:bodyPr rtlCol="0" anchor="ctr"/>
+              <a:lstStyle/>
+              <a:p>
+                <a:pPr algn="ctr"/>
+                <a:endParaRPr lang="fr-FR" dirty="0"/>
+              </a:p>
+            </p:txBody>
+          </p:sp>
+          <p:sp>
+            <p:nvSpPr>
+              <p:cNvPr id="105" name="Rectangle : coins arrondis 104">
+                <a:extLst>
+                  <a:ext uri="{FF2B5EF4-FFF2-40B4-BE49-F238E27FC236}">
+                    <a16:creationId xmlns:a16="http://schemas.microsoft.com/office/drawing/2014/main" id="{4ACAAB52-0DA2-A0DC-FE0C-2FA030992507}"/>
+                  </a:ext>
+                </a:extLst>
+              </p:cNvPr>
+              <p:cNvSpPr/>
+              <p:nvPr/>
+            </p:nvSpPr>
+            <p:spPr>
+              <a:xfrm>
+                <a:off x="6925621" y="4546528"/>
+                <a:ext cx="1224000" cy="648000"/>
+              </a:xfrm>
+              <a:prstGeom prst="roundRect">
+                <a:avLst>
+                  <a:gd name="adj" fmla="val 11155"/>
+                </a:avLst>
+              </a:prstGeom>
+              <a:noFill/>
+              <a:ln w="9525">
+                <a:solidFill>
+                  <a:schemeClr val="bg1">
+                    <a:lumMod val="85000"/>
+                  </a:schemeClr>
+                </a:solidFill>
+                <a:prstDash val="sysDash"/>
+              </a:ln>
+            </p:spPr>
+            <p:style>
+              <a:lnRef idx="2">
+                <a:schemeClr val="accent1">
+                  <a:shade val="50000"/>
+                </a:schemeClr>
+              </a:lnRef>
+              <a:fillRef idx="1">
+                <a:schemeClr val="accent1"/>
+              </a:fillRef>
+              <a:effectRef idx="0">
+                <a:schemeClr val="accent1"/>
+              </a:effectRef>
+              <a:fontRef idx="minor">
+                <a:schemeClr val="lt1"/>
+              </a:fontRef>
+            </p:style>
+            <p:txBody>
+              <a:bodyPr rtlCol="0" anchor="ctr"/>
+              <a:lstStyle/>
+              <a:p>
+                <a:pPr algn="ctr"/>
+                <a:endParaRPr lang="fr-FR" dirty="0"/>
+              </a:p>
+            </p:txBody>
+          </p:sp>
+          <p:sp>
+            <p:nvSpPr>
+              <p:cNvPr id="106" name="Rectangle : coins arrondis 105">
+                <a:extLst>
+                  <a:ext uri="{FF2B5EF4-FFF2-40B4-BE49-F238E27FC236}">
+                    <a16:creationId xmlns:a16="http://schemas.microsoft.com/office/drawing/2014/main" id="{143A1B2B-9D3A-DD46-5AD8-44AFCAE2048C}"/>
+                  </a:ext>
+                </a:extLst>
+              </p:cNvPr>
+              <p:cNvSpPr/>
+              <p:nvPr/>
+            </p:nvSpPr>
+            <p:spPr>
+              <a:xfrm>
+                <a:off x="8365243" y="4546528"/>
+                <a:ext cx="1224000" cy="648000"/>
+              </a:xfrm>
+              <a:prstGeom prst="roundRect">
+                <a:avLst>
+                  <a:gd name="adj" fmla="val 11155"/>
+                </a:avLst>
+              </a:prstGeom>
+              <a:noFill/>
+              <a:ln w="9525">
+                <a:solidFill>
+                  <a:schemeClr val="bg1">
+                    <a:lumMod val="85000"/>
+                  </a:schemeClr>
+                </a:solidFill>
+                <a:prstDash val="sysDash"/>
+              </a:ln>
+            </p:spPr>
+            <p:style>
+              <a:lnRef idx="2">
+                <a:schemeClr val="accent1">
+                  <a:shade val="50000"/>
+                </a:schemeClr>
+              </a:lnRef>
+              <a:fillRef idx="1">
+                <a:schemeClr val="accent1"/>
+              </a:fillRef>
+              <a:effectRef idx="0">
+                <a:schemeClr val="accent1"/>
+              </a:effectRef>
+              <a:fontRef idx="minor">
+                <a:schemeClr val="lt1"/>
+              </a:fontRef>
+            </p:style>
+            <p:txBody>
+              <a:bodyPr rtlCol="0" anchor="ctr"/>
+              <a:lstStyle/>
+              <a:p>
+                <a:pPr algn="ctr"/>
+                <a:endParaRPr lang="fr-FR" dirty="0"/>
+              </a:p>
+            </p:txBody>
+          </p:sp>
+        </p:grpSp>
+        <p:grpSp>
+          <p:nvGrpSpPr>
+            <p:cNvPr id="107" name="Groupe 106">
+              <a:extLst>
+                <a:ext uri="{FF2B5EF4-FFF2-40B4-BE49-F238E27FC236}">
+                  <a16:creationId xmlns:a16="http://schemas.microsoft.com/office/drawing/2014/main" id="{DE5F45D4-6088-FCB4-733F-EBC2FDEE2792}"/>
+                </a:ext>
+              </a:extLst>
+            </p:cNvPr>
+            <p:cNvGrpSpPr/>
+            <p:nvPr/>
+          </p:nvGrpSpPr>
+          <p:grpSpPr>
+            <a:xfrm>
+              <a:off x="2606758" y="3164050"/>
+              <a:ext cx="6982485" cy="648000"/>
+              <a:chOff x="2606758" y="4546528"/>
+              <a:chExt cx="6982485" cy="648000"/>
+            </a:xfrm>
+          </p:grpSpPr>
+          <p:sp>
+            <p:nvSpPr>
+              <p:cNvPr id="108" name="Rectangle : coins arrondis 107">
+                <a:extLst>
+                  <a:ext uri="{FF2B5EF4-FFF2-40B4-BE49-F238E27FC236}">
+                    <a16:creationId xmlns:a16="http://schemas.microsoft.com/office/drawing/2014/main" id="{40794F06-40D8-7CAC-9851-2E628A9B6C75}"/>
+                  </a:ext>
+                </a:extLst>
+              </p:cNvPr>
+              <p:cNvSpPr/>
+              <p:nvPr/>
+            </p:nvSpPr>
+            <p:spPr>
+              <a:xfrm>
+                <a:off x="5486000" y="4546528"/>
+                <a:ext cx="1224000" cy="648000"/>
+              </a:xfrm>
+              <a:prstGeom prst="roundRect">
+                <a:avLst>
+                  <a:gd name="adj" fmla="val 11155"/>
+                </a:avLst>
+              </a:prstGeom>
+              <a:noFill/>
+              <a:ln w="9525">
+                <a:solidFill>
+                  <a:schemeClr val="bg1">
+                    <a:lumMod val="85000"/>
+                  </a:schemeClr>
+                </a:solidFill>
+                <a:prstDash val="sysDash"/>
+              </a:ln>
+            </p:spPr>
+            <p:style>
+              <a:lnRef idx="2">
+                <a:schemeClr val="accent1">
+                  <a:shade val="50000"/>
+                </a:schemeClr>
+              </a:lnRef>
+              <a:fillRef idx="1">
+                <a:schemeClr val="accent1"/>
+              </a:fillRef>
+              <a:effectRef idx="0">
+                <a:schemeClr val="accent1"/>
+              </a:effectRef>
+              <a:fontRef idx="minor">
+                <a:schemeClr val="lt1"/>
+              </a:fontRef>
+            </p:style>
+            <p:txBody>
+              <a:bodyPr rtlCol="0" anchor="ctr"/>
+              <a:lstStyle/>
+              <a:p>
+                <a:pPr algn="ctr"/>
+                <a:endParaRPr lang="fr-FR" dirty="0"/>
+              </a:p>
+            </p:txBody>
+          </p:sp>
+          <p:sp>
+            <p:nvSpPr>
+              <p:cNvPr id="109" name="Rectangle : coins arrondis 108">
+                <a:extLst>
+                  <a:ext uri="{FF2B5EF4-FFF2-40B4-BE49-F238E27FC236}">
+                    <a16:creationId xmlns:a16="http://schemas.microsoft.com/office/drawing/2014/main" id="{D10E02A7-D7AF-F923-833A-7AE00D99E4FC}"/>
+                  </a:ext>
+                </a:extLst>
+              </p:cNvPr>
+              <p:cNvSpPr/>
+              <p:nvPr/>
+            </p:nvSpPr>
+            <p:spPr>
+              <a:xfrm>
+                <a:off x="4046379" y="4546528"/>
+                <a:ext cx="1224000" cy="648000"/>
+              </a:xfrm>
+              <a:prstGeom prst="roundRect">
+                <a:avLst>
+                  <a:gd name="adj" fmla="val 11155"/>
+                </a:avLst>
+              </a:prstGeom>
+              <a:noFill/>
+              <a:ln w="9525">
+                <a:solidFill>
+                  <a:schemeClr val="bg1">
+                    <a:lumMod val="85000"/>
+                  </a:schemeClr>
+                </a:solidFill>
+                <a:prstDash val="sysDash"/>
+              </a:ln>
+            </p:spPr>
+            <p:style>
+              <a:lnRef idx="2">
+                <a:schemeClr val="accent1">
+                  <a:shade val="50000"/>
+                </a:schemeClr>
+              </a:lnRef>
+              <a:fillRef idx="1">
+                <a:schemeClr val="accent1"/>
+              </a:fillRef>
+              <a:effectRef idx="0">
+                <a:schemeClr val="accent1"/>
+              </a:effectRef>
+              <a:fontRef idx="minor">
+                <a:schemeClr val="lt1"/>
+              </a:fontRef>
+            </p:style>
+            <p:txBody>
+              <a:bodyPr rtlCol="0" anchor="ctr"/>
+              <a:lstStyle/>
+              <a:p>
+                <a:pPr algn="ctr"/>
+                <a:endParaRPr lang="fr-FR" dirty="0"/>
+              </a:p>
+            </p:txBody>
+          </p:sp>
+          <p:sp>
+            <p:nvSpPr>
+              <p:cNvPr id="110" name="Rectangle : coins arrondis 109">
+                <a:extLst>
+                  <a:ext uri="{FF2B5EF4-FFF2-40B4-BE49-F238E27FC236}">
+                    <a16:creationId xmlns:a16="http://schemas.microsoft.com/office/drawing/2014/main" id="{D3A1FF20-1192-06C5-B6B5-5E8F5F4491E7}"/>
+                  </a:ext>
+                </a:extLst>
+              </p:cNvPr>
+              <p:cNvSpPr/>
+              <p:nvPr/>
+            </p:nvSpPr>
+            <p:spPr>
+              <a:xfrm>
+                <a:off x="2606758" y="4546528"/>
+                <a:ext cx="1224000" cy="648000"/>
+              </a:xfrm>
+              <a:prstGeom prst="roundRect">
+                <a:avLst>
+                  <a:gd name="adj" fmla="val 11155"/>
+                </a:avLst>
+              </a:prstGeom>
+              <a:noFill/>
+              <a:ln w="9525">
+                <a:solidFill>
+                  <a:schemeClr val="bg1">
+                    <a:lumMod val="85000"/>
+                  </a:schemeClr>
+                </a:solidFill>
+                <a:prstDash val="sysDash"/>
+              </a:ln>
+            </p:spPr>
+            <p:style>
+              <a:lnRef idx="2">
+                <a:schemeClr val="accent1">
+                  <a:shade val="50000"/>
+                </a:schemeClr>
+              </a:lnRef>
+              <a:fillRef idx="1">
+                <a:schemeClr val="accent1"/>
+              </a:fillRef>
+              <a:effectRef idx="0">
+                <a:schemeClr val="accent1"/>
+              </a:effectRef>
+              <a:fontRef idx="minor">
+                <a:schemeClr val="lt1"/>
+              </a:fontRef>
+            </p:style>
+            <p:txBody>
+              <a:bodyPr rtlCol="0" anchor="ctr"/>
+              <a:lstStyle/>
+              <a:p>
+                <a:pPr algn="ctr"/>
+                <a:endParaRPr lang="fr-FR" dirty="0"/>
+              </a:p>
+            </p:txBody>
+          </p:sp>
+          <p:sp>
+            <p:nvSpPr>
+              <p:cNvPr id="111" name="Rectangle : coins arrondis 110">
+                <a:extLst>
+                  <a:ext uri="{FF2B5EF4-FFF2-40B4-BE49-F238E27FC236}">
+                    <a16:creationId xmlns:a16="http://schemas.microsoft.com/office/drawing/2014/main" id="{9B433E95-FEFA-842E-1264-570D41B8DFFA}"/>
+                  </a:ext>
+                </a:extLst>
+              </p:cNvPr>
+              <p:cNvSpPr/>
+              <p:nvPr/>
+            </p:nvSpPr>
+            <p:spPr>
+              <a:xfrm>
+                <a:off x="6925621" y="4546528"/>
+                <a:ext cx="1224000" cy="648000"/>
+              </a:xfrm>
+              <a:prstGeom prst="roundRect">
+                <a:avLst>
+                  <a:gd name="adj" fmla="val 11155"/>
+                </a:avLst>
+              </a:prstGeom>
+              <a:noFill/>
+              <a:ln w="9525">
+                <a:solidFill>
+                  <a:schemeClr val="bg1">
+                    <a:lumMod val="85000"/>
+                  </a:schemeClr>
+                </a:solidFill>
+                <a:prstDash val="sysDash"/>
+              </a:ln>
+            </p:spPr>
+            <p:style>
+              <a:lnRef idx="2">
+                <a:schemeClr val="accent1">
+                  <a:shade val="50000"/>
+                </a:schemeClr>
+              </a:lnRef>
+              <a:fillRef idx="1">
+                <a:schemeClr val="accent1"/>
+              </a:fillRef>
+              <a:effectRef idx="0">
+                <a:schemeClr val="accent1"/>
+              </a:effectRef>
+              <a:fontRef idx="minor">
+                <a:schemeClr val="lt1"/>
+              </a:fontRef>
+            </p:style>
+            <p:txBody>
+              <a:bodyPr rtlCol="0" anchor="ctr"/>
+              <a:lstStyle/>
+              <a:p>
+                <a:pPr algn="ctr"/>
+                <a:endParaRPr lang="fr-FR" dirty="0"/>
+              </a:p>
+            </p:txBody>
+          </p:sp>
+          <p:sp>
+            <p:nvSpPr>
+              <p:cNvPr id="112" name="Rectangle : coins arrondis 111">
+                <a:extLst>
+                  <a:ext uri="{FF2B5EF4-FFF2-40B4-BE49-F238E27FC236}">
+                    <a16:creationId xmlns:a16="http://schemas.microsoft.com/office/drawing/2014/main" id="{E33B2D55-7263-DBC4-C359-082871CD0C3C}"/>
+                  </a:ext>
+                </a:extLst>
+              </p:cNvPr>
+              <p:cNvSpPr/>
+              <p:nvPr/>
+            </p:nvSpPr>
+            <p:spPr>
+              <a:xfrm>
+                <a:off x="8365243" y="4546528"/>
+                <a:ext cx="1224000" cy="648000"/>
+              </a:xfrm>
+              <a:prstGeom prst="roundRect">
+                <a:avLst>
+                  <a:gd name="adj" fmla="val 11155"/>
+                </a:avLst>
+              </a:prstGeom>
+              <a:noFill/>
+              <a:ln w="9525">
+                <a:solidFill>
+                  <a:schemeClr val="bg1">
+                    <a:lumMod val="85000"/>
+                  </a:schemeClr>
+                </a:solidFill>
+                <a:prstDash val="sysDash"/>
+              </a:ln>
+            </p:spPr>
+            <p:style>
+              <a:lnRef idx="2">
+                <a:schemeClr val="accent1">
+                  <a:shade val="50000"/>
+                </a:schemeClr>
+              </a:lnRef>
+              <a:fillRef idx="1">
+                <a:schemeClr val="accent1"/>
+              </a:fillRef>
+              <a:effectRef idx="0">
+                <a:schemeClr val="accent1"/>
+              </a:effectRef>
+              <a:fontRef idx="minor">
+                <a:schemeClr val="lt1"/>
+              </a:fontRef>
+            </p:style>
+            <p:txBody>
+              <a:bodyPr rtlCol="0" anchor="ctr"/>
+              <a:lstStyle/>
+              <a:p>
+                <a:pPr algn="ctr"/>
+                <a:endParaRPr lang="fr-FR" dirty="0"/>
+              </a:p>
+            </p:txBody>
+          </p:sp>
+        </p:grpSp>
+        <p:grpSp>
+          <p:nvGrpSpPr>
+            <p:cNvPr id="113" name="Groupe 112">
+              <a:extLst>
+                <a:ext uri="{FF2B5EF4-FFF2-40B4-BE49-F238E27FC236}">
+                  <a16:creationId xmlns:a16="http://schemas.microsoft.com/office/drawing/2014/main" id="{9DD3231A-E860-B6B8-7058-060B6EB34261}"/>
+                </a:ext>
+              </a:extLst>
+            </p:cNvPr>
+            <p:cNvGrpSpPr/>
+            <p:nvPr/>
+          </p:nvGrpSpPr>
+          <p:grpSpPr>
+            <a:xfrm>
+              <a:off x="2606758" y="2472811"/>
+              <a:ext cx="6982485" cy="648000"/>
+              <a:chOff x="2606758" y="4546528"/>
+              <a:chExt cx="6982485" cy="648000"/>
+            </a:xfrm>
+          </p:grpSpPr>
+          <p:sp>
+            <p:nvSpPr>
+              <p:cNvPr id="114" name="Rectangle : coins arrondis 113">
+                <a:extLst>
+                  <a:ext uri="{FF2B5EF4-FFF2-40B4-BE49-F238E27FC236}">
+                    <a16:creationId xmlns:a16="http://schemas.microsoft.com/office/drawing/2014/main" id="{C34B2478-83D4-F44C-08EB-31A1313B9149}"/>
+                  </a:ext>
+                </a:extLst>
+              </p:cNvPr>
+              <p:cNvSpPr/>
+              <p:nvPr/>
+            </p:nvSpPr>
+            <p:spPr>
+              <a:xfrm>
+                <a:off x="5486000" y="4546528"/>
+                <a:ext cx="1224000" cy="648000"/>
+              </a:xfrm>
+              <a:prstGeom prst="roundRect">
+                <a:avLst>
+                  <a:gd name="adj" fmla="val 11155"/>
+                </a:avLst>
+              </a:prstGeom>
+              <a:noFill/>
+              <a:ln w="9525">
+                <a:solidFill>
+                  <a:schemeClr val="bg1">
+                    <a:lumMod val="85000"/>
+                  </a:schemeClr>
+                </a:solidFill>
+                <a:prstDash val="sysDash"/>
+              </a:ln>
+            </p:spPr>
+            <p:style>
+              <a:lnRef idx="2">
+                <a:schemeClr val="accent1">
+                  <a:shade val="50000"/>
+                </a:schemeClr>
+              </a:lnRef>
+              <a:fillRef idx="1">
+                <a:schemeClr val="accent1"/>
+              </a:fillRef>
+              <a:effectRef idx="0">
+                <a:schemeClr val="accent1"/>
+              </a:effectRef>
+              <a:fontRef idx="minor">
+                <a:schemeClr val="lt1"/>
+              </a:fontRef>
+            </p:style>
+            <p:txBody>
+              <a:bodyPr rtlCol="0" anchor="ctr"/>
+              <a:lstStyle/>
+              <a:p>
+                <a:pPr algn="ctr"/>
+                <a:endParaRPr lang="fr-FR" dirty="0"/>
+              </a:p>
+            </p:txBody>
+          </p:sp>
+          <p:sp>
+            <p:nvSpPr>
+              <p:cNvPr id="115" name="Rectangle : coins arrondis 114">
+                <a:extLst>
+                  <a:ext uri="{FF2B5EF4-FFF2-40B4-BE49-F238E27FC236}">
+                    <a16:creationId xmlns:a16="http://schemas.microsoft.com/office/drawing/2014/main" id="{512B28A8-4632-6896-D9B8-DF1950D9D03F}"/>
+                  </a:ext>
+                </a:extLst>
+              </p:cNvPr>
+              <p:cNvSpPr/>
+              <p:nvPr/>
+            </p:nvSpPr>
+            <p:spPr>
+              <a:xfrm>
+                <a:off x="4046379" y="4546528"/>
+                <a:ext cx="1224000" cy="648000"/>
+              </a:xfrm>
+              <a:prstGeom prst="roundRect">
+                <a:avLst>
+                  <a:gd name="adj" fmla="val 11155"/>
+                </a:avLst>
+              </a:prstGeom>
+              <a:noFill/>
+              <a:ln w="9525">
+                <a:solidFill>
+                  <a:schemeClr val="bg1">
+                    <a:lumMod val="85000"/>
+                  </a:schemeClr>
+                </a:solidFill>
+                <a:prstDash val="sysDash"/>
+              </a:ln>
+            </p:spPr>
+            <p:style>
+              <a:lnRef idx="2">
+                <a:schemeClr val="accent1">
+                  <a:shade val="50000"/>
+                </a:schemeClr>
+              </a:lnRef>
+              <a:fillRef idx="1">
+                <a:schemeClr val="accent1"/>
+              </a:fillRef>
+              <a:effectRef idx="0">
+                <a:schemeClr val="accent1"/>
+              </a:effectRef>
+              <a:fontRef idx="minor">
+                <a:schemeClr val="lt1"/>
+              </a:fontRef>
+            </p:style>
+            <p:txBody>
+              <a:bodyPr rtlCol="0" anchor="ctr"/>
+              <a:lstStyle/>
+              <a:p>
+                <a:pPr algn="ctr"/>
+                <a:endParaRPr lang="fr-FR" dirty="0"/>
+              </a:p>
+            </p:txBody>
+          </p:sp>
+          <p:sp>
+            <p:nvSpPr>
+              <p:cNvPr id="116" name="Rectangle : coins arrondis 115">
+                <a:extLst>
+                  <a:ext uri="{FF2B5EF4-FFF2-40B4-BE49-F238E27FC236}">
+                    <a16:creationId xmlns:a16="http://schemas.microsoft.com/office/drawing/2014/main" id="{F8CC2C48-55E7-35F3-CF0B-A1B4FC82473F}"/>
+                  </a:ext>
+                </a:extLst>
+              </p:cNvPr>
+              <p:cNvSpPr/>
+              <p:nvPr/>
+            </p:nvSpPr>
+            <p:spPr>
+              <a:xfrm>
+                <a:off x="2606758" y="4546528"/>
+                <a:ext cx="1224000" cy="648000"/>
+              </a:xfrm>
+              <a:prstGeom prst="roundRect">
+                <a:avLst>
+                  <a:gd name="adj" fmla="val 11155"/>
+                </a:avLst>
+              </a:prstGeom>
+              <a:noFill/>
+              <a:ln w="9525">
+                <a:solidFill>
+                  <a:schemeClr val="bg1">
+                    <a:lumMod val="85000"/>
+                  </a:schemeClr>
+                </a:solidFill>
+                <a:prstDash val="sysDash"/>
+              </a:ln>
+            </p:spPr>
+            <p:style>
+              <a:lnRef idx="2">
+                <a:schemeClr val="accent1">
+                  <a:shade val="50000"/>
+                </a:schemeClr>
+              </a:lnRef>
+              <a:fillRef idx="1">
+                <a:schemeClr val="accent1"/>
+              </a:fillRef>
+              <a:effectRef idx="0">
+                <a:schemeClr val="accent1"/>
+              </a:effectRef>
+              <a:fontRef idx="minor">
+                <a:schemeClr val="lt1"/>
+              </a:fontRef>
+            </p:style>
+            <p:txBody>
+              <a:bodyPr rtlCol="0" anchor="ctr"/>
+              <a:lstStyle/>
+              <a:p>
+                <a:pPr algn="ctr"/>
+                <a:endParaRPr lang="fr-FR" dirty="0"/>
+              </a:p>
+            </p:txBody>
+          </p:sp>
+          <p:sp>
+            <p:nvSpPr>
+              <p:cNvPr id="117" name="Rectangle : coins arrondis 116">
+                <a:extLst>
+                  <a:ext uri="{FF2B5EF4-FFF2-40B4-BE49-F238E27FC236}">
+                    <a16:creationId xmlns:a16="http://schemas.microsoft.com/office/drawing/2014/main" id="{F5F76F0B-0B31-0619-02D3-2B97225C7CC1}"/>
+                  </a:ext>
+                </a:extLst>
+              </p:cNvPr>
+              <p:cNvSpPr/>
+              <p:nvPr/>
+            </p:nvSpPr>
+            <p:spPr>
+              <a:xfrm>
+                <a:off x="6925621" y="4546528"/>
+                <a:ext cx="1224000" cy="648000"/>
+              </a:xfrm>
+              <a:prstGeom prst="roundRect">
+                <a:avLst>
+                  <a:gd name="adj" fmla="val 11155"/>
+                </a:avLst>
+              </a:prstGeom>
+              <a:noFill/>
+              <a:ln w="9525">
+                <a:solidFill>
+                  <a:schemeClr val="bg1">
+                    <a:lumMod val="85000"/>
+                  </a:schemeClr>
+                </a:solidFill>
+                <a:prstDash val="sysDash"/>
+              </a:ln>
+            </p:spPr>
+            <p:style>
+              <a:lnRef idx="2">
+                <a:schemeClr val="accent1">
+                  <a:shade val="50000"/>
+                </a:schemeClr>
+              </a:lnRef>
+              <a:fillRef idx="1">
+                <a:schemeClr val="accent1"/>
+              </a:fillRef>
+              <a:effectRef idx="0">
+                <a:schemeClr val="accent1"/>
+              </a:effectRef>
+              <a:fontRef idx="minor">
+                <a:schemeClr val="lt1"/>
+              </a:fontRef>
+            </p:style>
+            <p:txBody>
+              <a:bodyPr rtlCol="0" anchor="ctr"/>
+              <a:lstStyle/>
+              <a:p>
+                <a:pPr algn="ctr"/>
+                <a:endParaRPr lang="fr-FR" dirty="0"/>
+              </a:p>
+            </p:txBody>
+          </p:sp>
+          <p:sp>
+            <p:nvSpPr>
+              <p:cNvPr id="118" name="Rectangle : coins arrondis 117">
+                <a:extLst>
+                  <a:ext uri="{FF2B5EF4-FFF2-40B4-BE49-F238E27FC236}">
+                    <a16:creationId xmlns:a16="http://schemas.microsoft.com/office/drawing/2014/main" id="{739FEBB7-6D4D-1853-CCC4-5B9F5C0AB300}"/>
+                  </a:ext>
+                </a:extLst>
+              </p:cNvPr>
+              <p:cNvSpPr/>
+              <p:nvPr/>
+            </p:nvSpPr>
+            <p:spPr>
+              <a:xfrm>
+                <a:off x="8365243" y="4546528"/>
+                <a:ext cx="1224000" cy="648000"/>
+              </a:xfrm>
+              <a:prstGeom prst="roundRect">
+                <a:avLst>
+                  <a:gd name="adj" fmla="val 11155"/>
+                </a:avLst>
+              </a:prstGeom>
+              <a:noFill/>
+              <a:ln w="9525">
+                <a:solidFill>
+                  <a:schemeClr val="bg1">
+                    <a:lumMod val="85000"/>
+                  </a:schemeClr>
+                </a:solidFill>
+                <a:prstDash val="sysDash"/>
+              </a:ln>
+            </p:spPr>
+            <p:style>
+              <a:lnRef idx="2">
+                <a:schemeClr val="accent1">
+                  <a:shade val="50000"/>
+                </a:schemeClr>
+              </a:lnRef>
+              <a:fillRef idx="1">
+                <a:schemeClr val="accent1"/>
+              </a:fillRef>
+              <a:effectRef idx="0">
+                <a:schemeClr val="accent1"/>
+              </a:effectRef>
+              <a:fontRef idx="minor">
+                <a:schemeClr val="lt1"/>
+              </a:fontRef>
+            </p:style>
+            <p:txBody>
+              <a:bodyPr rtlCol="0" anchor="ctr"/>
+              <a:lstStyle/>
+              <a:p>
+                <a:pPr algn="ctr"/>
+                <a:endParaRPr lang="fr-FR" dirty="0"/>
+              </a:p>
+            </p:txBody>
+          </p:sp>
+        </p:grpSp>
+        <p:grpSp>
+          <p:nvGrpSpPr>
+            <p:cNvPr id="119" name="Groupe 118">
+              <a:extLst>
+                <a:ext uri="{FF2B5EF4-FFF2-40B4-BE49-F238E27FC236}">
+                  <a16:creationId xmlns:a16="http://schemas.microsoft.com/office/drawing/2014/main" id="{80FEC2D6-32C9-B4D4-027C-E21E05A433E0}"/>
+                </a:ext>
+              </a:extLst>
+            </p:cNvPr>
+            <p:cNvGrpSpPr/>
+            <p:nvPr/>
+          </p:nvGrpSpPr>
+          <p:grpSpPr>
+            <a:xfrm>
+              <a:off x="2606758" y="1781572"/>
+              <a:ext cx="6982485" cy="648000"/>
+              <a:chOff x="2606758" y="4546528"/>
+              <a:chExt cx="6982485" cy="648000"/>
+            </a:xfrm>
+          </p:grpSpPr>
+          <p:sp>
+            <p:nvSpPr>
+              <p:cNvPr id="120" name="Rectangle : coins arrondis 119">
+                <a:extLst>
+                  <a:ext uri="{FF2B5EF4-FFF2-40B4-BE49-F238E27FC236}">
+                    <a16:creationId xmlns:a16="http://schemas.microsoft.com/office/drawing/2014/main" id="{19B97CF6-4B06-60A7-B5DB-703CD2450B42}"/>
+                  </a:ext>
+                </a:extLst>
+              </p:cNvPr>
+              <p:cNvSpPr/>
+              <p:nvPr/>
+            </p:nvSpPr>
+            <p:spPr>
+              <a:xfrm>
+                <a:off x="5486000" y="4546528"/>
+                <a:ext cx="1224000" cy="648000"/>
+              </a:xfrm>
+              <a:prstGeom prst="roundRect">
+                <a:avLst>
+                  <a:gd name="adj" fmla="val 11155"/>
+                </a:avLst>
+              </a:prstGeom>
+              <a:noFill/>
+              <a:ln w="9525">
+                <a:solidFill>
+                  <a:schemeClr val="bg1">
+                    <a:lumMod val="85000"/>
+                  </a:schemeClr>
+                </a:solidFill>
+                <a:prstDash val="sysDash"/>
+              </a:ln>
+            </p:spPr>
+            <p:style>
+              <a:lnRef idx="2">
+                <a:schemeClr val="accent1">
+                  <a:shade val="50000"/>
+                </a:schemeClr>
+              </a:lnRef>
+              <a:fillRef idx="1">
+                <a:schemeClr val="accent1"/>
+              </a:fillRef>
+              <a:effectRef idx="0">
+                <a:schemeClr val="accent1"/>
+              </a:effectRef>
+              <a:fontRef idx="minor">
+                <a:schemeClr val="lt1"/>
+              </a:fontRef>
+            </p:style>
+            <p:txBody>
+              <a:bodyPr rtlCol="0" anchor="ctr"/>
+              <a:lstStyle/>
+              <a:p>
+                <a:pPr algn="ctr"/>
+                <a:endParaRPr lang="fr-FR" dirty="0"/>
+              </a:p>
+            </p:txBody>
+          </p:sp>
+          <p:sp>
+            <p:nvSpPr>
+              <p:cNvPr id="121" name="Rectangle : coins arrondis 120">
+                <a:extLst>
+                  <a:ext uri="{FF2B5EF4-FFF2-40B4-BE49-F238E27FC236}">
+                    <a16:creationId xmlns:a16="http://schemas.microsoft.com/office/drawing/2014/main" id="{0CC50821-C298-BFDD-880F-6EECA23B3622}"/>
+                  </a:ext>
+                </a:extLst>
+              </p:cNvPr>
+              <p:cNvSpPr/>
+              <p:nvPr/>
+            </p:nvSpPr>
+            <p:spPr>
+              <a:xfrm>
+                <a:off x="4046379" y="4546528"/>
+                <a:ext cx="1224000" cy="648000"/>
+              </a:xfrm>
+              <a:prstGeom prst="roundRect">
+                <a:avLst>
+                  <a:gd name="adj" fmla="val 11155"/>
+                </a:avLst>
+              </a:prstGeom>
+              <a:noFill/>
+              <a:ln w="9525">
+                <a:solidFill>
+                  <a:schemeClr val="bg1">
+                    <a:lumMod val="85000"/>
+                  </a:schemeClr>
+                </a:solidFill>
+                <a:prstDash val="sysDash"/>
+              </a:ln>
+            </p:spPr>
+            <p:style>
+              <a:lnRef idx="2">
+                <a:schemeClr val="accent1">
+                  <a:shade val="50000"/>
+                </a:schemeClr>
+              </a:lnRef>
+              <a:fillRef idx="1">
+                <a:schemeClr val="accent1"/>
+              </a:fillRef>
+              <a:effectRef idx="0">
+                <a:schemeClr val="accent1"/>
+              </a:effectRef>
+              <a:fontRef idx="minor">
+                <a:schemeClr val="lt1"/>
+              </a:fontRef>
+            </p:style>
+            <p:txBody>
+              <a:bodyPr rtlCol="0" anchor="ctr"/>
+              <a:lstStyle/>
+              <a:p>
+                <a:pPr algn="ctr"/>
+                <a:endParaRPr lang="fr-FR" dirty="0"/>
+              </a:p>
+            </p:txBody>
+          </p:sp>
+          <p:sp>
+            <p:nvSpPr>
+              <p:cNvPr id="122" name="Rectangle : coins arrondis 121">
+                <a:extLst>
+                  <a:ext uri="{FF2B5EF4-FFF2-40B4-BE49-F238E27FC236}">
+                    <a16:creationId xmlns:a16="http://schemas.microsoft.com/office/drawing/2014/main" id="{53F9993B-C416-BB20-FF69-83FEA098B182}"/>
+                  </a:ext>
+                </a:extLst>
+              </p:cNvPr>
+              <p:cNvSpPr/>
+              <p:nvPr/>
+            </p:nvSpPr>
+            <p:spPr>
+              <a:xfrm>
+                <a:off x="2606758" y="4546528"/>
+                <a:ext cx="1224000" cy="648000"/>
+              </a:xfrm>
+              <a:prstGeom prst="roundRect">
+                <a:avLst>
+                  <a:gd name="adj" fmla="val 11155"/>
+                </a:avLst>
+              </a:prstGeom>
+              <a:noFill/>
+              <a:ln w="9525">
+                <a:solidFill>
+                  <a:schemeClr val="bg1">
+                    <a:lumMod val="85000"/>
+                  </a:schemeClr>
+                </a:solidFill>
+                <a:prstDash val="sysDash"/>
+              </a:ln>
+            </p:spPr>
+            <p:style>
+              <a:lnRef idx="2">
+                <a:schemeClr val="accent1">
+                  <a:shade val="50000"/>
+                </a:schemeClr>
+              </a:lnRef>
+              <a:fillRef idx="1">
+                <a:schemeClr val="accent1"/>
+              </a:fillRef>
+              <a:effectRef idx="0">
+                <a:schemeClr val="accent1"/>
+              </a:effectRef>
+              <a:fontRef idx="minor">
+                <a:schemeClr val="lt1"/>
+              </a:fontRef>
+            </p:style>
+            <p:txBody>
+              <a:bodyPr rtlCol="0" anchor="ctr"/>
+              <a:lstStyle/>
+              <a:p>
+                <a:pPr algn="ctr"/>
+                <a:endParaRPr lang="fr-FR" dirty="0"/>
+              </a:p>
+            </p:txBody>
+          </p:sp>
+          <p:sp>
+            <p:nvSpPr>
+              <p:cNvPr id="123" name="Rectangle : coins arrondis 122">
+                <a:extLst>
+                  <a:ext uri="{FF2B5EF4-FFF2-40B4-BE49-F238E27FC236}">
+                    <a16:creationId xmlns:a16="http://schemas.microsoft.com/office/drawing/2014/main" id="{81F3BE1A-1863-8001-6C26-A3E066ED084B}"/>
+                  </a:ext>
+                </a:extLst>
+              </p:cNvPr>
+              <p:cNvSpPr/>
+              <p:nvPr/>
+            </p:nvSpPr>
+            <p:spPr>
+              <a:xfrm>
+                <a:off x="6925621" y="4546528"/>
+                <a:ext cx="1224000" cy="648000"/>
+              </a:xfrm>
+              <a:prstGeom prst="roundRect">
+                <a:avLst>
+                  <a:gd name="adj" fmla="val 11155"/>
+                </a:avLst>
+              </a:prstGeom>
+              <a:noFill/>
+              <a:ln w="9525">
+                <a:solidFill>
+                  <a:schemeClr val="bg1">
+                    <a:lumMod val="85000"/>
+                  </a:schemeClr>
+                </a:solidFill>
+                <a:prstDash val="sysDash"/>
+              </a:ln>
+            </p:spPr>
+            <p:style>
+              <a:lnRef idx="2">
+                <a:schemeClr val="accent1">
+                  <a:shade val="50000"/>
+                </a:schemeClr>
+              </a:lnRef>
+              <a:fillRef idx="1">
+                <a:schemeClr val="accent1"/>
+              </a:fillRef>
+              <a:effectRef idx="0">
+                <a:schemeClr val="accent1"/>
+              </a:effectRef>
+              <a:fontRef idx="minor">
+                <a:schemeClr val="lt1"/>
+              </a:fontRef>
+            </p:style>
+            <p:txBody>
+              <a:bodyPr rtlCol="0" anchor="ctr"/>
+              <a:lstStyle/>
+              <a:p>
+                <a:pPr algn="ctr"/>
+                <a:endParaRPr lang="fr-FR" dirty="0"/>
+              </a:p>
+            </p:txBody>
+          </p:sp>
+          <p:sp>
+            <p:nvSpPr>
+              <p:cNvPr id="124" name="Rectangle : coins arrondis 123">
+                <a:extLst>
+                  <a:ext uri="{FF2B5EF4-FFF2-40B4-BE49-F238E27FC236}">
+                    <a16:creationId xmlns:a16="http://schemas.microsoft.com/office/drawing/2014/main" id="{99B1AE85-EB88-87DD-B483-C3321F36E606}"/>
+                  </a:ext>
+                </a:extLst>
+              </p:cNvPr>
+              <p:cNvSpPr/>
+              <p:nvPr/>
+            </p:nvSpPr>
+            <p:spPr>
+              <a:xfrm>
+                <a:off x="8365243" y="4546528"/>
+                <a:ext cx="1224000" cy="648000"/>
+              </a:xfrm>
+              <a:prstGeom prst="roundRect">
+                <a:avLst>
+                  <a:gd name="adj" fmla="val 11155"/>
+                </a:avLst>
+              </a:prstGeom>
+              <a:noFill/>
+              <a:ln w="9525">
+                <a:solidFill>
+                  <a:schemeClr val="bg1">
+                    <a:lumMod val="85000"/>
+                  </a:schemeClr>
+                </a:solidFill>
+                <a:prstDash val="sysDash"/>
+              </a:ln>
+            </p:spPr>
+            <p:style>
+              <a:lnRef idx="2">
+                <a:schemeClr val="accent1">
+                  <a:shade val="50000"/>
+                </a:schemeClr>
+              </a:lnRef>
+              <a:fillRef idx="1">
+                <a:schemeClr val="accent1"/>
+              </a:fillRef>
+              <a:effectRef idx="0">
+                <a:schemeClr val="accent1"/>
+              </a:effectRef>
+              <a:fontRef idx="minor">
+                <a:schemeClr val="lt1"/>
+              </a:fontRef>
+            </p:style>
+            <p:txBody>
+              <a:bodyPr rtlCol="0" anchor="ctr"/>
+              <a:lstStyle/>
+              <a:p>
+                <a:pPr algn="ctr"/>
+                <a:endParaRPr lang="fr-FR" dirty="0"/>
+              </a:p>
+            </p:txBody>
+          </p:sp>
+        </p:grpSp>
+        <p:grpSp>
+          <p:nvGrpSpPr>
+            <p:cNvPr id="125" name="Groupe 124">
+              <a:extLst>
+                <a:ext uri="{FF2B5EF4-FFF2-40B4-BE49-F238E27FC236}">
+                  <a16:creationId xmlns:a16="http://schemas.microsoft.com/office/drawing/2014/main" id="{3C07A6C0-CB75-71B2-CA7C-C31CE59A7387}"/>
+                </a:ext>
+              </a:extLst>
+            </p:cNvPr>
+            <p:cNvGrpSpPr/>
+            <p:nvPr/>
+          </p:nvGrpSpPr>
+          <p:grpSpPr>
+            <a:xfrm>
+              <a:off x="2606758" y="1090333"/>
+              <a:ext cx="6982485" cy="648000"/>
+              <a:chOff x="2606758" y="4546528"/>
+              <a:chExt cx="6982485" cy="648000"/>
+            </a:xfrm>
+          </p:grpSpPr>
+          <p:sp>
+            <p:nvSpPr>
+              <p:cNvPr id="126" name="Rectangle : coins arrondis 125">
+                <a:extLst>
+                  <a:ext uri="{FF2B5EF4-FFF2-40B4-BE49-F238E27FC236}">
+                    <a16:creationId xmlns:a16="http://schemas.microsoft.com/office/drawing/2014/main" id="{E709D3CF-F427-C41E-AFDB-1A0253B0F599}"/>
+                  </a:ext>
+                </a:extLst>
+              </p:cNvPr>
+              <p:cNvSpPr/>
+              <p:nvPr/>
+            </p:nvSpPr>
+            <p:spPr>
+              <a:xfrm>
+                <a:off x="5486000" y="4546528"/>
+                <a:ext cx="1224000" cy="648000"/>
+              </a:xfrm>
+              <a:prstGeom prst="roundRect">
+                <a:avLst>
+                  <a:gd name="adj" fmla="val 11155"/>
+                </a:avLst>
+              </a:prstGeom>
+              <a:noFill/>
+              <a:ln w="9525">
+                <a:solidFill>
+                  <a:schemeClr val="bg1">
+                    <a:lumMod val="85000"/>
+                  </a:schemeClr>
+                </a:solidFill>
+                <a:prstDash val="sysDash"/>
+              </a:ln>
+            </p:spPr>
+            <p:style>
+              <a:lnRef idx="2">
+                <a:schemeClr val="accent1">
+                  <a:shade val="50000"/>
+                </a:schemeClr>
+              </a:lnRef>
+              <a:fillRef idx="1">
+                <a:schemeClr val="accent1"/>
+              </a:fillRef>
+              <a:effectRef idx="0">
+                <a:schemeClr val="accent1"/>
+              </a:effectRef>
+              <a:fontRef idx="minor">
+                <a:schemeClr val="lt1"/>
+              </a:fontRef>
+            </p:style>
+            <p:txBody>
+              <a:bodyPr rtlCol="0" anchor="ctr"/>
+              <a:lstStyle/>
+              <a:p>
+                <a:pPr algn="ctr"/>
+                <a:endParaRPr lang="fr-FR" dirty="0"/>
+              </a:p>
+            </p:txBody>
+          </p:sp>
+          <p:sp>
+            <p:nvSpPr>
+              <p:cNvPr id="127" name="Rectangle : coins arrondis 126">
+                <a:extLst>
+                  <a:ext uri="{FF2B5EF4-FFF2-40B4-BE49-F238E27FC236}">
+                    <a16:creationId xmlns:a16="http://schemas.microsoft.com/office/drawing/2014/main" id="{4B96F3A0-4349-3643-96C7-29395DB67BDE}"/>
+                  </a:ext>
+                </a:extLst>
+              </p:cNvPr>
+              <p:cNvSpPr/>
+              <p:nvPr/>
+            </p:nvSpPr>
+            <p:spPr>
+              <a:xfrm>
+                <a:off x="4046379" y="4546528"/>
+                <a:ext cx="1224000" cy="648000"/>
+              </a:xfrm>
+              <a:prstGeom prst="roundRect">
+                <a:avLst>
+                  <a:gd name="adj" fmla="val 11155"/>
+                </a:avLst>
+              </a:prstGeom>
+              <a:noFill/>
+              <a:ln w="9525">
+                <a:solidFill>
+                  <a:schemeClr val="bg1">
+                    <a:lumMod val="85000"/>
+                  </a:schemeClr>
+                </a:solidFill>
+                <a:prstDash val="sysDash"/>
+              </a:ln>
+            </p:spPr>
+            <p:style>
+              <a:lnRef idx="2">
+                <a:schemeClr val="accent1">
+                  <a:shade val="50000"/>
+                </a:schemeClr>
+              </a:lnRef>
+              <a:fillRef idx="1">
+                <a:schemeClr val="accent1"/>
+              </a:fillRef>
+              <a:effectRef idx="0">
+                <a:schemeClr val="accent1"/>
+              </a:effectRef>
+              <a:fontRef idx="minor">
+                <a:schemeClr val="lt1"/>
+              </a:fontRef>
+            </p:style>
+            <p:txBody>
+              <a:bodyPr rtlCol="0" anchor="ctr"/>
+              <a:lstStyle/>
+              <a:p>
+                <a:pPr algn="ctr"/>
+                <a:endParaRPr lang="fr-FR" dirty="0"/>
+              </a:p>
+            </p:txBody>
+          </p:sp>
+          <p:sp>
+            <p:nvSpPr>
+              <p:cNvPr id="128" name="Rectangle : coins arrondis 127">
+                <a:extLst>
+                  <a:ext uri="{FF2B5EF4-FFF2-40B4-BE49-F238E27FC236}">
+                    <a16:creationId xmlns:a16="http://schemas.microsoft.com/office/drawing/2014/main" id="{80660D3E-5934-2956-366D-D9DA84AF8889}"/>
+                  </a:ext>
+                </a:extLst>
+              </p:cNvPr>
+              <p:cNvSpPr/>
+              <p:nvPr/>
+            </p:nvSpPr>
+            <p:spPr>
+              <a:xfrm>
+                <a:off x="2606758" y="4546528"/>
+                <a:ext cx="1224000" cy="648000"/>
+              </a:xfrm>
+              <a:prstGeom prst="roundRect">
+                <a:avLst>
+                  <a:gd name="adj" fmla="val 11155"/>
+                </a:avLst>
+              </a:prstGeom>
+              <a:noFill/>
+              <a:ln w="9525">
+                <a:solidFill>
+                  <a:schemeClr val="bg1">
+                    <a:lumMod val="85000"/>
+                  </a:schemeClr>
+                </a:solidFill>
+                <a:prstDash val="sysDash"/>
+              </a:ln>
+            </p:spPr>
+            <p:style>
+              <a:lnRef idx="2">
+                <a:schemeClr val="accent1">
+                  <a:shade val="50000"/>
+                </a:schemeClr>
+              </a:lnRef>
+              <a:fillRef idx="1">
+                <a:schemeClr val="accent1"/>
+              </a:fillRef>
+              <a:effectRef idx="0">
+                <a:schemeClr val="accent1"/>
+              </a:effectRef>
+              <a:fontRef idx="minor">
+                <a:schemeClr val="lt1"/>
+              </a:fontRef>
+            </p:style>
+            <p:txBody>
+              <a:bodyPr rtlCol="0" anchor="ctr"/>
+              <a:lstStyle/>
+              <a:p>
+                <a:pPr algn="ctr"/>
+                <a:endParaRPr lang="fr-FR" dirty="0"/>
+              </a:p>
+            </p:txBody>
+          </p:sp>
+          <p:sp>
+            <p:nvSpPr>
+              <p:cNvPr id="129" name="Rectangle : coins arrondis 128">
+                <a:extLst>
+                  <a:ext uri="{FF2B5EF4-FFF2-40B4-BE49-F238E27FC236}">
+                    <a16:creationId xmlns:a16="http://schemas.microsoft.com/office/drawing/2014/main" id="{F3E89160-8297-F34A-0885-D22A9AB589E2}"/>
+                  </a:ext>
+                </a:extLst>
+              </p:cNvPr>
+              <p:cNvSpPr/>
+              <p:nvPr/>
+            </p:nvSpPr>
+            <p:spPr>
+              <a:xfrm>
+                <a:off x="6925621" y="4546528"/>
+                <a:ext cx="1224000" cy="648000"/>
+              </a:xfrm>
+              <a:prstGeom prst="roundRect">
+                <a:avLst>
+                  <a:gd name="adj" fmla="val 11155"/>
+                </a:avLst>
+              </a:prstGeom>
+              <a:noFill/>
+              <a:ln w="9525">
+                <a:solidFill>
+                  <a:schemeClr val="bg1">
+                    <a:lumMod val="85000"/>
+                  </a:schemeClr>
+                </a:solidFill>
+                <a:prstDash val="sysDash"/>
+              </a:ln>
+            </p:spPr>
+            <p:style>
+              <a:lnRef idx="2">
+                <a:schemeClr val="accent1">
+                  <a:shade val="50000"/>
+                </a:schemeClr>
+              </a:lnRef>
+              <a:fillRef idx="1">
+                <a:schemeClr val="accent1"/>
+              </a:fillRef>
+              <a:effectRef idx="0">
+                <a:schemeClr val="accent1"/>
+              </a:effectRef>
+              <a:fontRef idx="minor">
+                <a:schemeClr val="lt1"/>
+              </a:fontRef>
+            </p:style>
+            <p:txBody>
+              <a:bodyPr rtlCol="0" anchor="ctr"/>
+              <a:lstStyle/>
+              <a:p>
+                <a:pPr algn="ctr"/>
+                <a:endParaRPr lang="fr-FR" dirty="0"/>
+              </a:p>
+            </p:txBody>
+          </p:sp>
+          <p:sp>
+            <p:nvSpPr>
+              <p:cNvPr id="130" name="Rectangle : coins arrondis 129">
+                <a:extLst>
+                  <a:ext uri="{FF2B5EF4-FFF2-40B4-BE49-F238E27FC236}">
+                    <a16:creationId xmlns:a16="http://schemas.microsoft.com/office/drawing/2014/main" id="{FC03AAAE-EA3B-711D-A8A2-1B6D09D48308}"/>
+                  </a:ext>
+                </a:extLst>
+              </p:cNvPr>
+              <p:cNvSpPr/>
+              <p:nvPr/>
+            </p:nvSpPr>
+            <p:spPr>
+              <a:xfrm>
+                <a:off x="8365243" y="4546528"/>
+                <a:ext cx="1224000" cy="648000"/>
+              </a:xfrm>
+              <a:prstGeom prst="roundRect">
+                <a:avLst>
+                  <a:gd name="adj" fmla="val 11155"/>
+                </a:avLst>
+              </a:prstGeom>
+              <a:noFill/>
+              <a:ln w="9525">
+                <a:solidFill>
+                  <a:schemeClr val="bg1">
+                    <a:lumMod val="85000"/>
+                  </a:schemeClr>
+                </a:solidFill>
+                <a:prstDash val="sysDash"/>
+              </a:ln>
+            </p:spPr>
+            <p:style>
+              <a:lnRef idx="2">
+                <a:schemeClr val="accent1">
+                  <a:shade val="50000"/>
+                </a:schemeClr>
+              </a:lnRef>
+              <a:fillRef idx="1">
+                <a:schemeClr val="accent1"/>
+              </a:fillRef>
+              <a:effectRef idx="0">
+                <a:schemeClr val="accent1"/>
+              </a:effectRef>
+              <a:fontRef idx="minor">
+                <a:schemeClr val="lt1"/>
+              </a:fontRef>
+            </p:style>
+            <p:txBody>
+              <a:bodyPr rtlCol="0" anchor="ctr"/>
+              <a:lstStyle/>
+              <a:p>
+                <a:pPr algn="ctr"/>
+                <a:endParaRPr lang="fr-FR" dirty="0"/>
+              </a:p>
+            </p:txBody>
+          </p:sp>
+        </p:grpSp>
+      </p:grpSp>
+      <p:cxnSp>
+        <p:nvCxnSpPr>
+          <p:cNvPr id="5" name="Connecteur droit 4">
+            <a:extLst>
+              <a:ext uri="{FF2B5EF4-FFF2-40B4-BE49-F238E27FC236}">
+                <a16:creationId xmlns:a16="http://schemas.microsoft.com/office/drawing/2014/main" id="{A999FADA-6DD9-D223-7599-3C507101F0C3}"/>
+              </a:ext>
+            </a:extLst>
+          </p:cNvPr>
+          <p:cNvCxnSpPr/>
+          <p:nvPr/>
+        </p:nvCxnSpPr>
+        <p:spPr>
+          <a:xfrm>
+            <a:off x="3218758" y="4870528"/>
+            <a:ext cx="2885681" cy="0"/>
+          </a:xfrm>
+          <a:prstGeom prst="line">
+            <a:avLst/>
+          </a:prstGeom>
+          <a:ln w="28575">
+            <a:solidFill>
+              <a:srgbClr val="002060"/>
+            </a:solidFill>
+            <a:tailEnd type="stealth" w="med" len="lg"/>
+          </a:ln>
+        </p:spPr>
+        <p:style>
+          <a:lnRef idx="1">
+            <a:schemeClr val="accent1"/>
+          </a:lnRef>
+          <a:fillRef idx="0">
+            <a:schemeClr val="accent1"/>
+          </a:fillRef>
+          <a:effectRef idx="0">
+            <a:schemeClr val="accent1"/>
+          </a:effectRef>
+          <a:fontRef idx="minor">
+            <a:schemeClr val="tx1"/>
+          </a:fontRef>
+        </p:style>
+      </p:cxnSp>
+      <p:cxnSp>
+        <p:nvCxnSpPr>
+          <p:cNvPr id="6" name="Connecteur droit 5">
+            <a:extLst>
+              <a:ext uri="{FF2B5EF4-FFF2-40B4-BE49-F238E27FC236}">
+                <a16:creationId xmlns:a16="http://schemas.microsoft.com/office/drawing/2014/main" id="{5966F4FB-1E45-BD86-D9CF-B52DA728B630}"/>
+              </a:ext>
+            </a:extLst>
+          </p:cNvPr>
+          <p:cNvCxnSpPr>
+            <a:cxnSpLocks/>
+          </p:cNvCxnSpPr>
+          <p:nvPr/>
+        </p:nvCxnSpPr>
+        <p:spPr>
+          <a:xfrm flipV="1">
+            <a:off x="3218758" y="1336655"/>
+            <a:ext cx="0" cy="3533873"/>
+          </a:xfrm>
+          <a:prstGeom prst="line">
+            <a:avLst/>
+          </a:prstGeom>
+          <a:ln w="28575">
+            <a:solidFill>
+              <a:srgbClr val="002060"/>
+            </a:solidFill>
+            <a:tailEnd type="stealth" w="med" len="lg"/>
+          </a:ln>
+        </p:spPr>
+        <p:style>
+          <a:lnRef idx="1">
+            <a:schemeClr val="accent1"/>
+          </a:lnRef>
+          <a:fillRef idx="0">
+            <a:schemeClr val="accent1"/>
+          </a:fillRef>
+          <a:effectRef idx="0">
+            <a:schemeClr val="accent1"/>
+          </a:effectRef>
+          <a:fontRef idx="minor">
+            <a:schemeClr val="tx1"/>
+          </a:fontRef>
+        </p:style>
+      </p:cxnSp>
+      <mc:AlternateContent xmlns:mc="http://schemas.openxmlformats.org/markup-compatibility/2006" xmlns:a14="http://schemas.microsoft.com/office/drawing/2010/main">
+        <mc:Choice Requires="a14">
+          <p:sp>
+            <p:nvSpPr>
+              <p:cNvPr id="9" name="ZoneTexte 8">
+                <a:extLst>
+                  <a:ext uri="{FF2B5EF4-FFF2-40B4-BE49-F238E27FC236}">
+                    <a16:creationId xmlns:a16="http://schemas.microsoft.com/office/drawing/2014/main" id="{61B08C72-5336-A8FB-01C1-91DE628C4488}"/>
+                  </a:ext>
+                </a:extLst>
+              </p:cNvPr>
+              <p:cNvSpPr txBox="1"/>
+              <p:nvPr/>
+            </p:nvSpPr>
+            <p:spPr>
+              <a:xfrm>
+                <a:off x="6194585" y="4744385"/>
+                <a:ext cx="183319" cy="276999"/>
+              </a:xfrm>
+              <a:prstGeom prst="rect">
+                <a:avLst/>
+              </a:prstGeom>
+              <a:noFill/>
+            </p:spPr>
+            <p:txBody>
+              <a:bodyPr wrap="none" lIns="0" tIns="0" rIns="0" bIns="0" rtlCol="0">
+                <a:spAutoFit/>
+              </a:bodyPr>
+              <a:lstStyle/>
+              <a:p>
+                <a:pPr/>
+                <a14:m>
+                  <m:oMathPara xmlns:m="http://schemas.openxmlformats.org/officeDocument/2006/math">
+                    <m:oMathParaPr>
+                      <m:jc m:val="centerGroup"/>
+                    </m:oMathParaPr>
+                    <m:oMath xmlns:m="http://schemas.openxmlformats.org/officeDocument/2006/math">
+                      <m:acc>
+                        <m:accPr>
+                          <m:chr m:val="⃗"/>
+                          <m:ctrlPr>
+                            <a:rPr lang="fr-FR" b="0" i="1" smtClean="0">
+                              <a:latin typeface="Cambria Math" panose="02040503050406030204" pitchFamily="18" charset="0"/>
+                            </a:rPr>
+                          </m:ctrlPr>
+                        </m:accPr>
+                        <m:e>
+                          <m:r>
+                            <a:rPr lang="fr-FR" b="0" i="1" smtClean="0">
+                              <a:latin typeface="Cambria Math" panose="02040503050406030204" pitchFamily="18" charset="0"/>
+                            </a:rPr>
+                            <m:t>𝑥</m:t>
+                          </m:r>
+                        </m:e>
+                      </m:acc>
+                    </m:oMath>
+                  </m:oMathPara>
+                </a14:m>
+                <a:endParaRPr lang="fr-FR" dirty="0"/>
+              </a:p>
+            </p:txBody>
+          </p:sp>
+        </mc:Choice>
+        <mc:Fallback xmlns="">
+          <p:sp>
+            <p:nvSpPr>
+              <p:cNvPr id="9" name="ZoneTexte 8">
+                <a:extLst>
+                  <a:ext uri="{FF2B5EF4-FFF2-40B4-BE49-F238E27FC236}">
+                    <a16:creationId xmlns:a16="http://schemas.microsoft.com/office/drawing/2014/main" id="{E583F976-3937-722D-513E-61D45BAB1813}"/>
+                  </a:ext>
+                </a:extLst>
+              </p:cNvPr>
+              <p:cNvSpPr txBox="1">
+                <a:spLocks noRot="1" noChangeAspect="1" noMove="1" noResize="1" noEditPoints="1" noAdjustHandles="1" noChangeArrowheads="1" noChangeShapeType="1" noTextEdit="1"/>
+              </p:cNvSpPr>
+              <p:nvPr/>
+            </p:nvSpPr>
+            <p:spPr>
+              <a:xfrm>
+                <a:off x="6194585" y="4744385"/>
+                <a:ext cx="183319" cy="276999"/>
+              </a:xfrm>
+              <a:prstGeom prst="rect">
+                <a:avLst/>
+              </a:prstGeom>
+              <a:blipFill>
+                <a:blip r:embed="rId5"/>
+                <a:stretch>
+                  <a:fillRect l="-33333" t="-45652" r="-103333" b="-8696"/>
+                </a:stretch>
+              </a:blipFill>
+            </p:spPr>
+            <p:txBody>
+              <a:bodyPr/>
+              <a:lstStyle/>
+              <a:p>
+                <a:r>
+                  <a:rPr lang="fr-FR">
+                    <a:noFill/>
+                  </a:rPr>
+                  <a:t> </a:t>
+                </a:r>
+              </a:p>
+            </p:txBody>
+          </p:sp>
+        </mc:Fallback>
+      </mc:AlternateContent>
+      <mc:AlternateContent xmlns:mc="http://schemas.openxmlformats.org/markup-compatibility/2006" xmlns:a14="http://schemas.microsoft.com/office/drawing/2010/main">
+        <mc:Choice Requires="a14">
+          <p:sp>
+            <p:nvSpPr>
+              <p:cNvPr id="11" name="ZoneTexte 10">
+                <a:extLst>
+                  <a:ext uri="{FF2B5EF4-FFF2-40B4-BE49-F238E27FC236}">
+                    <a16:creationId xmlns:a16="http://schemas.microsoft.com/office/drawing/2014/main" id="{14D7BF79-5616-5455-FB4D-7949349E5759}"/>
+                  </a:ext>
+                </a:extLst>
+              </p:cNvPr>
+              <p:cNvSpPr txBox="1"/>
+              <p:nvPr/>
+            </p:nvSpPr>
+            <p:spPr>
+              <a:xfrm>
+                <a:off x="2486661" y="1223876"/>
+                <a:ext cx="967938" cy="369332"/>
+              </a:xfrm>
+              <a:prstGeom prst="rect">
+                <a:avLst/>
+              </a:prstGeom>
+              <a:noFill/>
+            </p:spPr>
+            <p:txBody>
+              <a:bodyPr wrap="square">
+                <a:spAutoFit/>
+              </a:bodyPr>
+              <a:lstStyle/>
+              <a:p>
+                <a:pPr/>
+                <a14:m>
+                  <m:oMathPara xmlns:m="http://schemas.openxmlformats.org/officeDocument/2006/math">
+                    <m:oMathParaPr>
+                      <m:jc m:val="centerGroup"/>
+                    </m:oMathParaPr>
+                    <m:oMath xmlns:m="http://schemas.openxmlformats.org/officeDocument/2006/math">
+                      <m:acc>
+                        <m:accPr>
+                          <m:chr m:val="⃗"/>
+                          <m:ctrlPr>
+                            <a:rPr lang="fr-FR" b="0" i="1" smtClean="0">
+                              <a:latin typeface="Cambria Math" panose="02040503050406030204" pitchFamily="18" charset="0"/>
+                            </a:rPr>
+                          </m:ctrlPr>
+                        </m:accPr>
+                        <m:e>
+                          <m:r>
+                            <a:rPr lang="fr-FR" b="0" i="1" smtClean="0">
+                              <a:latin typeface="Cambria Math" panose="02040503050406030204" pitchFamily="18" charset="0"/>
+                            </a:rPr>
+                            <m:t>𝑦</m:t>
+                          </m:r>
+                        </m:e>
+                      </m:acc>
+                    </m:oMath>
+                  </m:oMathPara>
+                </a14:m>
+                <a:endParaRPr lang="fr-FR" dirty="0"/>
+              </a:p>
+            </p:txBody>
+          </p:sp>
+        </mc:Choice>
+        <mc:Fallback xmlns="">
+          <p:sp>
+            <p:nvSpPr>
+              <p:cNvPr id="11" name="ZoneTexte 10">
+                <a:extLst>
+                  <a:ext uri="{FF2B5EF4-FFF2-40B4-BE49-F238E27FC236}">
+                    <a16:creationId xmlns:a16="http://schemas.microsoft.com/office/drawing/2014/main" id="{28C6F854-38A4-1DC5-9613-55062A9DA6B5}"/>
+                  </a:ext>
+                </a:extLst>
+              </p:cNvPr>
+              <p:cNvSpPr txBox="1">
+                <a:spLocks noRot="1" noChangeAspect="1" noMove="1" noResize="1" noEditPoints="1" noAdjustHandles="1" noChangeArrowheads="1" noChangeShapeType="1" noTextEdit="1"/>
+              </p:cNvSpPr>
+              <p:nvPr/>
+            </p:nvSpPr>
+            <p:spPr>
+              <a:xfrm>
+                <a:off x="2486661" y="1223876"/>
+                <a:ext cx="967938" cy="369332"/>
+              </a:xfrm>
+              <a:prstGeom prst="rect">
+                <a:avLst/>
+              </a:prstGeom>
+              <a:blipFill>
+                <a:blip r:embed="rId6"/>
+                <a:stretch>
+                  <a:fillRect t="-23333" b="-6667"/>
+                </a:stretch>
+              </a:blipFill>
+            </p:spPr>
+            <p:txBody>
+              <a:bodyPr/>
+              <a:lstStyle/>
+              <a:p>
+                <a:r>
+                  <a:rPr lang="fr-FR">
+                    <a:noFill/>
+                  </a:rPr>
+                  <a:t> </a:t>
+                </a:r>
+              </a:p>
+            </p:txBody>
+          </p:sp>
+        </mc:Fallback>
+      </mc:AlternateContent>
+      <p:sp>
+        <p:nvSpPr>
+          <p:cNvPr id="12" name="Ellipse 11">
+            <a:extLst>
+              <a:ext uri="{FF2B5EF4-FFF2-40B4-BE49-F238E27FC236}">
+                <a16:creationId xmlns:a16="http://schemas.microsoft.com/office/drawing/2014/main" id="{226CFE9F-1E3F-58A5-DE28-95CAD5CBDCC3}"/>
+              </a:ext>
+            </a:extLst>
+          </p:cNvPr>
+          <p:cNvSpPr/>
+          <p:nvPr/>
+        </p:nvSpPr>
+        <p:spPr>
+          <a:xfrm>
+            <a:off x="3128611" y="4780529"/>
+            <a:ext cx="180000" cy="180000"/>
+          </a:xfrm>
+          <a:prstGeom prst="ellipse">
+            <a:avLst/>
+          </a:prstGeom>
+          <a:solidFill>
+            <a:schemeClr val="bg1"/>
+          </a:solidFill>
+          <a:ln w="28575">
+            <a:solidFill>
+              <a:srgbClr val="002060"/>
+            </a:solidFill>
+          </a:ln>
+        </p:spPr>
+        <p:style>
+          <a:lnRef idx="2">
+            <a:schemeClr val="accent1">
+              <a:shade val="50000"/>
+            </a:schemeClr>
+          </a:lnRef>
+          <a:fillRef idx="1">
+            <a:schemeClr val="accent1"/>
+          </a:fillRef>
+          <a:effectRef idx="0">
+            <a:schemeClr val="accent1"/>
+          </a:effectRef>
+          <a:fontRef idx="minor">
+            <a:schemeClr val="lt1"/>
+          </a:fontRef>
+        </p:style>
+        <p:txBody>
+          <a:bodyPr rtlCol="0" anchor="ctr"/>
+          <a:lstStyle/>
+          <a:p>
+            <a:pPr algn="ctr"/>
+            <a:endParaRPr lang="fr-FR" dirty="0"/>
+          </a:p>
+        </p:txBody>
+      </p:sp>
+      <p:sp>
+        <p:nvSpPr>
+          <p:cNvPr id="13" name="Ellipse 12">
+            <a:extLst>
+              <a:ext uri="{FF2B5EF4-FFF2-40B4-BE49-F238E27FC236}">
+                <a16:creationId xmlns:a16="http://schemas.microsoft.com/office/drawing/2014/main" id="{BA40A73C-DC82-41A0-8D73-87520CDA86E2}"/>
+              </a:ext>
+            </a:extLst>
+          </p:cNvPr>
+          <p:cNvSpPr/>
+          <p:nvPr/>
+        </p:nvSpPr>
+        <p:spPr>
+          <a:xfrm>
+            <a:off x="3194376" y="4846293"/>
+            <a:ext cx="48471" cy="48471"/>
+          </a:xfrm>
+          <a:prstGeom prst="ellipse">
+            <a:avLst/>
+          </a:prstGeom>
+          <a:solidFill>
+            <a:srgbClr val="002060"/>
+          </a:solidFill>
+          <a:ln w="28575">
+            <a:solidFill>
+              <a:srgbClr val="002060"/>
+            </a:solidFill>
+          </a:ln>
+        </p:spPr>
+        <p:style>
+          <a:lnRef idx="2">
+            <a:schemeClr val="accent1">
+              <a:shade val="50000"/>
+            </a:schemeClr>
+          </a:lnRef>
+          <a:fillRef idx="1">
+            <a:schemeClr val="accent1"/>
+          </a:fillRef>
+          <a:effectRef idx="0">
+            <a:schemeClr val="accent1"/>
+          </a:effectRef>
+          <a:fontRef idx="minor">
+            <a:schemeClr val="lt1"/>
+          </a:fontRef>
+        </p:style>
+        <p:txBody>
+          <a:bodyPr rtlCol="0" anchor="ctr"/>
+          <a:lstStyle/>
+          <a:p>
+            <a:pPr algn="ctr"/>
+            <a:endParaRPr lang="fr-FR" dirty="0"/>
+          </a:p>
+        </p:txBody>
+      </p:sp>
+      <mc:AlternateContent xmlns:mc="http://schemas.openxmlformats.org/markup-compatibility/2006" xmlns:a14="http://schemas.microsoft.com/office/drawing/2010/main">
+        <mc:Choice Requires="a14">
+          <p:sp>
+            <p:nvSpPr>
+              <p:cNvPr id="14" name="ZoneTexte 13">
+                <a:extLst>
+                  <a:ext uri="{FF2B5EF4-FFF2-40B4-BE49-F238E27FC236}">
+                    <a16:creationId xmlns:a16="http://schemas.microsoft.com/office/drawing/2014/main" id="{1C319A48-86A9-C951-D7F7-5281A7D54159}"/>
+                  </a:ext>
+                </a:extLst>
+              </p:cNvPr>
+              <p:cNvSpPr txBox="1"/>
+              <p:nvPr/>
+            </p:nvSpPr>
+            <p:spPr>
+              <a:xfrm>
+                <a:off x="2812864" y="4593529"/>
+                <a:ext cx="214033" cy="276999"/>
+              </a:xfrm>
+              <a:prstGeom prst="rect">
+                <a:avLst/>
+              </a:prstGeom>
+              <a:noFill/>
+            </p:spPr>
+            <p:txBody>
+              <a:bodyPr wrap="none" lIns="0" tIns="0" rIns="0" bIns="0" rtlCol="0">
+                <a:spAutoFit/>
+              </a:bodyPr>
+              <a:lstStyle/>
+              <a:p>
+                <a:pPr/>
+                <a14:m>
+                  <m:oMathPara xmlns:m="http://schemas.openxmlformats.org/officeDocument/2006/math">
+                    <m:oMathParaPr>
+                      <m:jc m:val="centerGroup"/>
+                    </m:oMathParaPr>
+                    <m:oMath xmlns:m="http://schemas.openxmlformats.org/officeDocument/2006/math">
+                      <m:r>
+                        <a:rPr lang="fr-FR" b="0" i="1" smtClean="0">
+                          <a:latin typeface="Cambria Math" panose="02040503050406030204" pitchFamily="18" charset="0"/>
+                        </a:rPr>
+                        <m:t>𝑂</m:t>
+                      </m:r>
+                    </m:oMath>
+                  </m:oMathPara>
+                </a14:m>
+                <a:endParaRPr lang="fr-FR" dirty="0"/>
+              </a:p>
+            </p:txBody>
+          </p:sp>
+        </mc:Choice>
+        <mc:Fallback xmlns="">
+          <p:sp>
+            <p:nvSpPr>
+              <p:cNvPr id="14" name="ZoneTexte 13">
+                <a:extLst>
+                  <a:ext uri="{FF2B5EF4-FFF2-40B4-BE49-F238E27FC236}">
+                    <a16:creationId xmlns:a16="http://schemas.microsoft.com/office/drawing/2014/main" id="{FF58FFE0-02CC-2CD7-1E8E-3869B9E46535}"/>
+                  </a:ext>
+                </a:extLst>
+              </p:cNvPr>
+              <p:cNvSpPr txBox="1">
+                <a:spLocks noRot="1" noChangeAspect="1" noMove="1" noResize="1" noEditPoints="1" noAdjustHandles="1" noChangeArrowheads="1" noChangeShapeType="1" noTextEdit="1"/>
+              </p:cNvSpPr>
+              <p:nvPr/>
+            </p:nvSpPr>
+            <p:spPr>
+              <a:xfrm>
+                <a:off x="2812864" y="4593529"/>
+                <a:ext cx="214033" cy="276999"/>
+              </a:xfrm>
+              <a:prstGeom prst="rect">
+                <a:avLst/>
+              </a:prstGeom>
+              <a:blipFill>
+                <a:blip r:embed="rId7"/>
+                <a:stretch>
+                  <a:fillRect l="-25000" r="-22222" b="-6667"/>
+                </a:stretch>
+              </a:blipFill>
+            </p:spPr>
+            <p:txBody>
+              <a:bodyPr/>
+              <a:lstStyle/>
+              <a:p>
+                <a:r>
+                  <a:rPr lang="fr-FR">
+                    <a:noFill/>
+                  </a:rPr>
+                  <a:t> </a:t>
+                </a:r>
+              </a:p>
+            </p:txBody>
+          </p:sp>
+        </mc:Fallback>
+      </mc:AlternateContent>
+      <p:grpSp>
+        <p:nvGrpSpPr>
+          <p:cNvPr id="135" name="Groupe 134">
+            <a:extLst>
+              <a:ext uri="{FF2B5EF4-FFF2-40B4-BE49-F238E27FC236}">
+                <a16:creationId xmlns:a16="http://schemas.microsoft.com/office/drawing/2014/main" id="{C0548ED6-D218-CDB6-0561-A54719349B06}"/>
+              </a:ext>
+            </a:extLst>
+          </p:cNvPr>
+          <p:cNvGrpSpPr/>
+          <p:nvPr/>
+        </p:nvGrpSpPr>
+        <p:grpSpPr>
+          <a:xfrm>
+            <a:off x="5520000" y="3583381"/>
+            <a:ext cx="1152000" cy="588367"/>
+            <a:chOff x="5520000" y="3583381"/>
+            <a:chExt cx="1152000" cy="588367"/>
+          </a:xfrm>
+        </p:grpSpPr>
+        <p:sp>
+          <p:nvSpPr>
+            <p:cNvPr id="15" name="Ellipse 14">
+              <a:extLst>
+                <a:ext uri="{FF2B5EF4-FFF2-40B4-BE49-F238E27FC236}">
+                  <a16:creationId xmlns:a16="http://schemas.microsoft.com/office/drawing/2014/main" id="{D3D320E6-8B2B-5261-A6D1-111FE735CC9C}"/>
+                </a:ext>
+              </a:extLst>
+            </p:cNvPr>
+            <p:cNvSpPr/>
+            <p:nvPr/>
+          </p:nvSpPr>
+          <p:spPr>
+            <a:xfrm>
+              <a:off x="6080203" y="3876565"/>
+              <a:ext cx="48471" cy="48471"/>
+            </a:xfrm>
+            <a:prstGeom prst="ellipse">
+              <a:avLst/>
+            </a:prstGeom>
+            <a:solidFill>
+              <a:srgbClr val="C00000"/>
+            </a:solidFill>
+            <a:ln w="28575">
+              <a:solidFill>
+                <a:srgbClr val="C00000"/>
+              </a:solidFill>
+            </a:ln>
+          </p:spPr>
+          <p:style>
+            <a:lnRef idx="2">
+              <a:schemeClr val="accent1">
+                <a:shade val="50000"/>
+              </a:schemeClr>
+            </a:lnRef>
+            <a:fillRef idx="1">
+              <a:schemeClr val="accent1"/>
+            </a:fillRef>
+            <a:effectRef idx="0">
+              <a:schemeClr val="accent1"/>
+            </a:effectRef>
+            <a:fontRef idx="minor">
+              <a:schemeClr val="lt1"/>
+            </a:fontRef>
+          </p:style>
+          <p:txBody>
+            <a:bodyPr rtlCol="0" anchor="ctr"/>
+            <a:lstStyle/>
+            <a:p>
+              <a:pPr algn="ctr"/>
+              <a:endParaRPr lang="fr-FR" dirty="0"/>
+            </a:p>
+          </p:txBody>
+        </p:sp>
+        <mc:AlternateContent xmlns:mc="http://schemas.openxmlformats.org/markup-compatibility/2006" xmlns:a14="http://schemas.microsoft.com/office/drawing/2010/main">
+          <mc:Choice Requires="a14">
+            <p:sp>
+              <p:nvSpPr>
+                <p:cNvPr id="17" name="ZoneTexte 16">
+                  <a:extLst>
+                    <a:ext uri="{FF2B5EF4-FFF2-40B4-BE49-F238E27FC236}">
+                      <a16:creationId xmlns:a16="http://schemas.microsoft.com/office/drawing/2014/main" id="{E8E21EDC-C5C5-838E-E9D7-8B3FDC020C56}"/>
+                    </a:ext>
+                  </a:extLst>
+                </p:cNvPr>
+                <p:cNvSpPr txBox="1"/>
+                <p:nvPr/>
+              </p:nvSpPr>
+              <p:spPr>
+                <a:xfrm>
+                  <a:off x="5981368" y="3583381"/>
+                  <a:ext cx="255711" cy="276999"/>
+                </a:xfrm>
+                <a:prstGeom prst="rect">
+                  <a:avLst/>
+                </a:prstGeom>
+                <a:noFill/>
+              </p:spPr>
+              <p:txBody>
+                <a:bodyPr wrap="none" lIns="0" tIns="0" rIns="0" bIns="0" rtlCol="0">
+                  <a:spAutoFit/>
+                </a:bodyPr>
+                <a:lstStyle/>
+                <a:p>
+                  <a:pPr/>
+                  <a14:m>
+                    <m:oMathPara xmlns:m="http://schemas.openxmlformats.org/officeDocument/2006/math">
+                      <m:oMathParaPr>
+                        <m:jc m:val="centerGroup"/>
+                      </m:oMathParaPr>
+                      <m:oMath xmlns:m="http://schemas.openxmlformats.org/officeDocument/2006/math">
+                        <m:r>
+                          <a:rPr lang="fr-FR" b="0" i="1" smtClean="0">
+                            <a:latin typeface="Cambria Math" panose="02040503050406030204" pitchFamily="18" charset="0"/>
+                          </a:rPr>
+                          <m:t>𝑀</m:t>
+                        </m:r>
+                      </m:oMath>
+                    </m:oMathPara>
+                  </a14:m>
+                  <a:endParaRPr lang="fr-FR" dirty="0"/>
+                </a:p>
+              </p:txBody>
+            </p:sp>
+          </mc:Choice>
+          <mc:Fallback xmlns="">
+            <p:sp>
+              <p:nvSpPr>
+                <p:cNvPr id="17" name="ZoneTexte 16">
+                  <a:extLst>
+                    <a:ext uri="{FF2B5EF4-FFF2-40B4-BE49-F238E27FC236}">
+                      <a16:creationId xmlns:a16="http://schemas.microsoft.com/office/drawing/2014/main" id="{0FDEB27B-0EA1-F9A4-E42C-572E59DD0A40}"/>
+                    </a:ext>
+                  </a:extLst>
+                </p:cNvPr>
+                <p:cNvSpPr txBox="1">
+                  <a:spLocks noRot="1" noChangeAspect="1" noMove="1" noResize="1" noEditPoints="1" noAdjustHandles="1" noChangeArrowheads="1" noChangeShapeType="1" noTextEdit="1"/>
+                </p:cNvSpPr>
+                <p:nvPr/>
+              </p:nvSpPr>
+              <p:spPr>
+                <a:xfrm>
+                  <a:off x="5981368" y="3583381"/>
+                  <a:ext cx="255711" cy="276999"/>
+                </a:xfrm>
+                <a:prstGeom prst="rect">
+                  <a:avLst/>
+                </a:prstGeom>
+                <a:blipFill>
+                  <a:blip r:embed="rId8"/>
+                  <a:stretch>
+                    <a:fillRect l="-21429" r="-19048" b="-6667"/>
+                  </a:stretch>
+                </a:blipFill>
+              </p:spPr>
+              <p:txBody>
+                <a:bodyPr/>
+                <a:lstStyle/>
+                <a:p>
+                  <a:r>
+                    <a:rPr lang="fr-FR">
+                      <a:noFill/>
+                    </a:rPr>
+                    <a:t> </a:t>
+                  </a:r>
+                </a:p>
+              </p:txBody>
+            </p:sp>
+          </mc:Fallback>
+        </mc:AlternateContent>
+        <p:grpSp>
+          <p:nvGrpSpPr>
+            <p:cNvPr id="23" name="Groupe 22">
+              <a:extLst>
+                <a:ext uri="{FF2B5EF4-FFF2-40B4-BE49-F238E27FC236}">
+                  <a16:creationId xmlns:a16="http://schemas.microsoft.com/office/drawing/2014/main" id="{49D591BC-F1CC-F1BC-FA58-ABC869F8208D}"/>
+                </a:ext>
+              </a:extLst>
+            </p:cNvPr>
+            <p:cNvGrpSpPr/>
+            <p:nvPr/>
+          </p:nvGrpSpPr>
+          <p:grpSpPr>
+            <a:xfrm>
+              <a:off x="5520000" y="3595748"/>
+              <a:ext cx="1152000" cy="576000"/>
+              <a:chOff x="4651128" y="2719448"/>
+              <a:chExt cx="1152000" cy="576000"/>
+            </a:xfrm>
+          </p:grpSpPr>
+          <p:sp>
+            <p:nvSpPr>
+              <p:cNvPr id="25" name="Ellipse 24">
+                <a:extLst>
+                  <a:ext uri="{FF2B5EF4-FFF2-40B4-BE49-F238E27FC236}">
+                    <a16:creationId xmlns:a16="http://schemas.microsoft.com/office/drawing/2014/main" id="{7A5CD4B4-6201-3D88-4CB9-FA30124504BB}"/>
+                  </a:ext>
+                </a:extLst>
+              </p:cNvPr>
+              <p:cNvSpPr/>
+              <p:nvPr/>
+            </p:nvSpPr>
+            <p:spPr>
+              <a:xfrm>
+                <a:off x="4692650" y="2774949"/>
+                <a:ext cx="180000" cy="180000"/>
+              </a:xfrm>
+              <a:prstGeom prst="ellipse">
+                <a:avLst/>
+              </a:prstGeom>
+              <a:noFill/>
+              <a:ln w="19050">
+                <a:solidFill>
+                  <a:srgbClr val="C00000"/>
+                </a:solidFill>
+              </a:ln>
+            </p:spPr>
+            <p:style>
+              <a:lnRef idx="2">
+                <a:schemeClr val="accent1">
+                  <a:shade val="50000"/>
+                </a:schemeClr>
+              </a:lnRef>
+              <a:fillRef idx="1">
+                <a:schemeClr val="accent1"/>
+              </a:fillRef>
+              <a:effectRef idx="0">
+                <a:schemeClr val="accent1"/>
+              </a:effectRef>
+              <a:fontRef idx="minor">
+                <a:schemeClr val="lt1"/>
+              </a:fontRef>
+            </p:style>
+            <p:txBody>
+              <a:bodyPr rtlCol="0" anchor="ctr"/>
+              <a:lstStyle/>
+              <a:p>
+                <a:pPr algn="ctr"/>
+                <a:endParaRPr lang="fr-FR" dirty="0"/>
+              </a:p>
+            </p:txBody>
+          </p:sp>
+          <p:sp>
+            <p:nvSpPr>
+              <p:cNvPr id="27" name="Ellipse 26">
+                <a:extLst>
+                  <a:ext uri="{FF2B5EF4-FFF2-40B4-BE49-F238E27FC236}">
+                    <a16:creationId xmlns:a16="http://schemas.microsoft.com/office/drawing/2014/main" id="{1ED6D422-5719-C312-9039-EAA3173A38C3}"/>
+                  </a:ext>
+                </a:extLst>
+              </p:cNvPr>
+              <p:cNvSpPr/>
+              <p:nvPr/>
+            </p:nvSpPr>
+            <p:spPr>
+              <a:xfrm>
+                <a:off x="4692650" y="3060598"/>
+                <a:ext cx="180000" cy="180000"/>
+              </a:xfrm>
+              <a:prstGeom prst="ellipse">
+                <a:avLst/>
+              </a:prstGeom>
+              <a:noFill/>
+              <a:ln w="19050">
+                <a:solidFill>
+                  <a:srgbClr val="C00000"/>
+                </a:solidFill>
+              </a:ln>
+            </p:spPr>
+            <p:style>
+              <a:lnRef idx="2">
+                <a:schemeClr val="accent1">
+                  <a:shade val="50000"/>
+                </a:schemeClr>
+              </a:lnRef>
+              <a:fillRef idx="1">
+                <a:schemeClr val="accent1"/>
+              </a:fillRef>
+              <a:effectRef idx="0">
+                <a:schemeClr val="accent1"/>
+              </a:effectRef>
+              <a:fontRef idx="minor">
+                <a:schemeClr val="lt1"/>
+              </a:fontRef>
+            </p:style>
+            <p:txBody>
+              <a:bodyPr rtlCol="0" anchor="ctr"/>
+              <a:lstStyle/>
+              <a:p>
+                <a:pPr algn="ctr"/>
+                <a:endParaRPr lang="fr-FR"/>
+              </a:p>
+            </p:txBody>
+          </p:sp>
+          <p:sp>
+            <p:nvSpPr>
+              <p:cNvPr id="28" name="Ellipse 27">
+                <a:extLst>
+                  <a:ext uri="{FF2B5EF4-FFF2-40B4-BE49-F238E27FC236}">
+                    <a16:creationId xmlns:a16="http://schemas.microsoft.com/office/drawing/2014/main" id="{AB50512F-9957-C6A8-CB5B-B9BCE9AA6E9B}"/>
+                  </a:ext>
+                </a:extLst>
+              </p:cNvPr>
+              <p:cNvSpPr/>
+              <p:nvPr/>
+            </p:nvSpPr>
+            <p:spPr>
+              <a:xfrm>
+                <a:off x="5584825" y="3060598"/>
+                <a:ext cx="180000" cy="180000"/>
+              </a:xfrm>
+              <a:prstGeom prst="ellipse">
+                <a:avLst/>
+              </a:prstGeom>
+              <a:noFill/>
+              <a:ln w="19050">
+                <a:solidFill>
+                  <a:srgbClr val="C00000"/>
+                </a:solidFill>
+              </a:ln>
+            </p:spPr>
+            <p:style>
+              <a:lnRef idx="2">
+                <a:schemeClr val="accent1">
+                  <a:shade val="50000"/>
+                </a:schemeClr>
+              </a:lnRef>
+              <a:fillRef idx="1">
+                <a:schemeClr val="accent1"/>
+              </a:fillRef>
+              <a:effectRef idx="0">
+                <a:schemeClr val="accent1"/>
+              </a:effectRef>
+              <a:fontRef idx="minor">
+                <a:schemeClr val="lt1"/>
+              </a:fontRef>
+            </p:style>
+            <p:txBody>
+              <a:bodyPr rtlCol="0" anchor="ctr"/>
+              <a:lstStyle/>
+              <a:p>
+                <a:pPr algn="ctr"/>
+                <a:endParaRPr lang="fr-FR"/>
+              </a:p>
+            </p:txBody>
+          </p:sp>
+          <p:sp>
+            <p:nvSpPr>
+              <p:cNvPr id="26" name="Ellipse 25">
+                <a:extLst>
+                  <a:ext uri="{FF2B5EF4-FFF2-40B4-BE49-F238E27FC236}">
+                    <a16:creationId xmlns:a16="http://schemas.microsoft.com/office/drawing/2014/main" id="{2A1CB2F0-1510-A1EE-411E-5A7CB717F8ED}"/>
+                  </a:ext>
+                </a:extLst>
+              </p:cNvPr>
+              <p:cNvSpPr/>
+              <p:nvPr/>
+            </p:nvSpPr>
+            <p:spPr>
+              <a:xfrm>
+                <a:off x="5584825" y="2774949"/>
+                <a:ext cx="180000" cy="180000"/>
+              </a:xfrm>
+              <a:prstGeom prst="ellipse">
+                <a:avLst/>
+              </a:prstGeom>
+              <a:solidFill>
+                <a:schemeClr val="bg1"/>
+              </a:solidFill>
+              <a:ln w="19050">
+                <a:solidFill>
+                  <a:srgbClr val="C00000"/>
+                </a:solidFill>
+              </a:ln>
+            </p:spPr>
+            <p:style>
+              <a:lnRef idx="2">
+                <a:schemeClr val="accent1">
+                  <a:shade val="50000"/>
+                </a:schemeClr>
+              </a:lnRef>
+              <a:fillRef idx="1">
+                <a:schemeClr val="accent1"/>
+              </a:fillRef>
+              <a:effectRef idx="0">
+                <a:schemeClr val="accent1"/>
+              </a:effectRef>
+              <a:fontRef idx="minor">
+                <a:schemeClr val="lt1"/>
+              </a:fontRef>
+            </p:style>
+            <p:txBody>
+              <a:bodyPr rtlCol="0" anchor="ctr"/>
+              <a:lstStyle/>
+              <a:p>
+                <a:pPr algn="ctr"/>
+                <a:endParaRPr lang="fr-FR"/>
+              </a:p>
+            </p:txBody>
+          </p:sp>
+          <p:sp>
+            <p:nvSpPr>
+              <p:cNvPr id="24" name="Rectangle : coins arrondis 23">
+                <a:extLst>
+                  <a:ext uri="{FF2B5EF4-FFF2-40B4-BE49-F238E27FC236}">
+                    <a16:creationId xmlns:a16="http://schemas.microsoft.com/office/drawing/2014/main" id="{11CAA897-2D35-F33A-B33C-982F0A84DD06}"/>
+                  </a:ext>
+                </a:extLst>
+              </p:cNvPr>
+              <p:cNvSpPr/>
+              <p:nvPr/>
+            </p:nvSpPr>
+            <p:spPr>
+              <a:xfrm>
+                <a:off x="4651128" y="2719448"/>
+                <a:ext cx="1152000" cy="576000"/>
+              </a:xfrm>
+              <a:prstGeom prst="roundRect">
+                <a:avLst/>
+              </a:prstGeom>
+              <a:noFill/>
+              <a:ln w="19050">
+                <a:solidFill>
+                  <a:srgbClr val="C00000"/>
+                </a:solidFill>
+              </a:ln>
+            </p:spPr>
+            <p:style>
+              <a:lnRef idx="2">
+                <a:schemeClr val="accent1">
+                  <a:shade val="50000"/>
+                </a:schemeClr>
+              </a:lnRef>
+              <a:fillRef idx="1">
+                <a:schemeClr val="accent1"/>
+              </a:fillRef>
+              <a:effectRef idx="0">
+                <a:schemeClr val="accent1"/>
+              </a:effectRef>
+              <a:fontRef idx="minor">
+                <a:schemeClr val="lt1"/>
+              </a:fontRef>
+            </p:style>
+            <p:txBody>
+              <a:bodyPr rtlCol="0" anchor="ctr"/>
+              <a:lstStyle/>
+              <a:p>
+                <a:pPr algn="ctr"/>
+                <a:endParaRPr lang="fr-FR" dirty="0"/>
+              </a:p>
+            </p:txBody>
+          </p:sp>
+        </p:grpSp>
+      </p:grpSp>
+      <p:cxnSp>
+        <p:nvCxnSpPr>
+          <p:cNvPr id="94" name="Connecteur droit 93">
+            <a:extLst>
+              <a:ext uri="{FF2B5EF4-FFF2-40B4-BE49-F238E27FC236}">
+                <a16:creationId xmlns:a16="http://schemas.microsoft.com/office/drawing/2014/main" id="{211B23AD-834A-54DD-6B68-7F61E9BEAD43}"/>
+              </a:ext>
+            </a:extLst>
+          </p:cNvPr>
+          <p:cNvCxnSpPr>
+            <a:cxnSpLocks/>
+            <a:stCxn id="29" idx="1"/>
+            <a:endCxn id="18" idx="1"/>
+          </p:cNvCxnSpPr>
+          <p:nvPr/>
+        </p:nvCxnSpPr>
+        <p:spPr>
+          <a:xfrm flipH="1" flipV="1">
+            <a:off x="9387895" y="492450"/>
+            <a:ext cx="127279" cy="127279"/>
+          </a:xfrm>
+          <a:prstGeom prst="line">
+            <a:avLst/>
+          </a:prstGeom>
+          <a:ln w="19050">
+            <a:solidFill>
+              <a:srgbClr val="7030A0"/>
+            </a:solidFill>
+          </a:ln>
+        </p:spPr>
+        <p:style>
+          <a:lnRef idx="1">
+            <a:schemeClr val="accent1"/>
+          </a:lnRef>
+          <a:fillRef idx="0">
+            <a:schemeClr val="accent1"/>
+          </a:fillRef>
+          <a:effectRef idx="0">
+            <a:schemeClr val="accent1"/>
+          </a:effectRef>
+          <a:fontRef idx="minor">
+            <a:schemeClr val="tx1"/>
+          </a:fontRef>
+        </p:style>
+      </p:cxnSp>
+    </p:spTree>
+    <p:extLst>
+      <p:ext uri="{BB962C8B-B14F-4D97-AF65-F5344CB8AC3E}">
+        <p14:creationId xmlns:p14="http://schemas.microsoft.com/office/powerpoint/2010/main" val="3318920544"/>
+      </p:ext>
+    </p:extLst>
+  </p:cSld>
+  <p:clrMapOvr>
+    <a:masterClrMapping/>
+  </p:clrMapOvr>
+</p:sld>
+</file>
+
+<file path=ppt/slides/slide9.xml><?xml version="1.0" encoding="utf-8"?>
+<p:sld xmlns:a="http://schemas.openxmlformats.org/drawingml/2006/main" xmlns:r="http://schemas.openxmlformats.org/officeDocument/2006/relationships" xmlns:p="http://schemas.openxmlformats.org/presentationml/2006/main">
+  <p:cSld>
+    <p:spTree>
+      <p:nvGrpSpPr>
         <p:cNvPr id="1" name=""/>
         <p:cNvGrpSpPr/>
         <p:nvPr/>
@@ -42285,95 +46552,6 @@
 </p:sld>
 </file>
 
-<file path=ppt/slides/slide9.xml><?xml version="1.0" encoding="utf-8"?>
-<p:sld xmlns:a="http://schemas.openxmlformats.org/drawingml/2006/main" xmlns:r="http://schemas.openxmlformats.org/officeDocument/2006/relationships" xmlns:p="http://schemas.openxmlformats.org/presentationml/2006/main">
-  <p:cSld>
-    <p:spTree>
-      <p:nvGrpSpPr>
-        <p:cNvPr id="1" name="">
-          <a:extLst>
-            <a:ext uri="{FF2B5EF4-FFF2-40B4-BE49-F238E27FC236}">
-              <a16:creationId xmlns:a16="http://schemas.microsoft.com/office/drawing/2014/main" id="{2D1B5B4F-C0E0-A648-356B-CB4550E6A2A8}"/>
-            </a:ext>
-          </a:extLst>
-        </p:cNvPr>
-        <p:cNvGrpSpPr/>
-        <p:nvPr/>
-      </p:nvGrpSpPr>
-      <p:grpSpPr>
-        <a:xfrm>
-          <a:off x="0" y="0"/>
-          <a:ext cx="0" cy="0"/>
-          <a:chOff x="0" y="0"/>
-          <a:chExt cx="0" cy="0"/>
-        </a:xfrm>
-      </p:grpSpPr>
-      <p:sp>
-        <p:nvSpPr>
-          <p:cNvPr id="4" name="Titre 3">
-            <a:extLst>
-              <a:ext uri="{FF2B5EF4-FFF2-40B4-BE49-F238E27FC236}">
-                <a16:creationId xmlns:a16="http://schemas.microsoft.com/office/drawing/2014/main" id="{09E8A4D1-0111-9B71-040B-A441D54D405F}"/>
-              </a:ext>
-            </a:extLst>
-          </p:cNvPr>
-          <p:cNvSpPr>
-            <a:spLocks noGrp="1"/>
-          </p:cNvSpPr>
-          <p:nvPr>
-            <p:ph type="title"/>
-          </p:nvPr>
-        </p:nvSpPr>
-        <p:spPr/>
-        <p:txBody>
-          <a:bodyPr/>
-          <a:lstStyle/>
-          <a:p>
-            <a:r>
-              <a:rPr lang="fr-FR" dirty="0"/>
-              <a:t>Modèle inverse</a:t>
-            </a:r>
-          </a:p>
-        </p:txBody>
-      </p:sp>
-      <p:sp>
-        <p:nvSpPr>
-          <p:cNvPr id="5" name="Espace réservé du texte 4">
-            <a:extLst>
-              <a:ext uri="{FF2B5EF4-FFF2-40B4-BE49-F238E27FC236}">
-                <a16:creationId xmlns:a16="http://schemas.microsoft.com/office/drawing/2014/main" id="{B5CAE9EC-5093-714D-BE89-7C5EE8BE66A3}"/>
-              </a:ext>
-            </a:extLst>
-          </p:cNvPr>
-          <p:cNvSpPr>
-            <a:spLocks noGrp="1"/>
-          </p:cNvSpPr>
-          <p:nvPr>
-            <p:ph type="body" idx="1"/>
-          </p:nvPr>
-        </p:nvSpPr>
-        <p:spPr/>
-        <p:txBody>
-          <a:bodyPr/>
-          <a:lstStyle/>
-          <a:p>
-            <a:endParaRPr lang="fr-FR"/>
-          </a:p>
-        </p:txBody>
-      </p:sp>
-    </p:spTree>
-    <p:extLst>
-      <p:ext uri="{BB962C8B-B14F-4D97-AF65-F5344CB8AC3E}">
-        <p14:creationId xmlns:p14="http://schemas.microsoft.com/office/powerpoint/2010/main" val="1426399900"/>
-      </p:ext>
-    </p:extLst>
-  </p:cSld>
-  <p:clrMapOvr>
-    <a:masterClrMapping/>
-  </p:clrMapOvr>
-</p:sld>
-</file>
-
 <file path=ppt/theme/theme1.xml><?xml version="1.0" encoding="utf-8"?>
 <a:theme xmlns:a="http://schemas.openxmlformats.org/drawingml/2006/main" name="Thème Office">
   <a:themeElements>
